--- a/public/lessons/year-6-maths/autumn/week-7/use-mental-multiplication-and-division-strategies/teaching-powerpoint-v1.pptx
+++ b/public/lessons/year-6-maths/autumn/week-7/use-mental-multiplication-and-division-strategies/teaching-powerpoint-v1.pptx
@@ -2,24 +2,24 @@
 <file path=ppt/presentation.xml><?xml version="1.0" encoding="utf-8"?>
 <p:presentation xmlns:p="http://schemas.openxmlformats.org/presentationml/2006/main">
   <p:sldMasterIdLst>
-    <p:sldMasterId xmlns:r="http://schemas.openxmlformats.org/officeDocument/2006/relationships" id="2147483648" r:id="Rf3b1e5b7710d423a"/>
+    <p:sldMasterId xmlns:r="http://schemas.openxmlformats.org/officeDocument/2006/relationships" id="2147483648" r:id="R7aab808d2d904513"/>
   </p:sldMasterIdLst>
   <p:notesMasterIdLst>
-    <p:notesMasterId xmlns:r="http://schemas.openxmlformats.org/officeDocument/2006/relationships" r:id="R1f4e0f196f3a425f"/>
+    <p:notesMasterId xmlns:r="http://schemas.openxmlformats.org/officeDocument/2006/relationships" r:id="R94682476d0a747d2"/>
   </p:notesMasterIdLst>
   <p:sldIdLst>
-    <p:sldId xmlns:r="http://schemas.openxmlformats.org/officeDocument/2006/relationships" id="256" r:id="Raa8373d316224ab1"/>
-    <p:sldId xmlns:r="http://schemas.openxmlformats.org/officeDocument/2006/relationships" id="257" r:id="R7b949f70fe334cb7"/>
-    <p:sldId xmlns:r="http://schemas.openxmlformats.org/officeDocument/2006/relationships" id="258" r:id="R0a53c3cd2d5f4c93"/>
-    <p:sldId xmlns:r="http://schemas.openxmlformats.org/officeDocument/2006/relationships" id="259" r:id="R2b0c888624d04149"/>
-    <p:sldId xmlns:r="http://schemas.openxmlformats.org/officeDocument/2006/relationships" id="260" r:id="Rd91dcbf29aea45ee"/>
-    <p:sldId xmlns:r="http://schemas.openxmlformats.org/officeDocument/2006/relationships" id="261" r:id="R32122c21e4484bbe"/>
-    <p:sldId xmlns:r="http://schemas.openxmlformats.org/officeDocument/2006/relationships" id="262" r:id="R94e855ce95524a53"/>
-    <p:sldId xmlns:r="http://schemas.openxmlformats.org/officeDocument/2006/relationships" id="263" r:id="R382c37ac8d804415"/>
-    <p:sldId xmlns:r="http://schemas.openxmlformats.org/officeDocument/2006/relationships" id="264" r:id="R537774df24284394"/>
-    <p:sldId xmlns:r="http://schemas.openxmlformats.org/officeDocument/2006/relationships" id="265" r:id="Rd75cf7ee1eb14e98"/>
-    <p:sldId xmlns:r="http://schemas.openxmlformats.org/officeDocument/2006/relationships" id="266" r:id="Re78e0abd4fb24a6a"/>
-    <p:sldId xmlns:r="http://schemas.openxmlformats.org/officeDocument/2006/relationships" id="267" r:id="R3398f33187b146e3"/>
+    <p:sldId xmlns:r="http://schemas.openxmlformats.org/officeDocument/2006/relationships" id="256" r:id="Ra01f77c850044c1f"/>
+    <p:sldId xmlns:r="http://schemas.openxmlformats.org/officeDocument/2006/relationships" id="257" r:id="Ra3d11d663b884815"/>
+    <p:sldId xmlns:r="http://schemas.openxmlformats.org/officeDocument/2006/relationships" id="258" r:id="R8a53b396777d46aa"/>
+    <p:sldId xmlns:r="http://schemas.openxmlformats.org/officeDocument/2006/relationships" id="259" r:id="Rc1402eb6ae9b47da"/>
+    <p:sldId xmlns:r="http://schemas.openxmlformats.org/officeDocument/2006/relationships" id="260" r:id="R4685275a63d34ffc"/>
+    <p:sldId xmlns:r="http://schemas.openxmlformats.org/officeDocument/2006/relationships" id="261" r:id="Rb5a22fdd02e1450c"/>
+    <p:sldId xmlns:r="http://schemas.openxmlformats.org/officeDocument/2006/relationships" id="262" r:id="R5b28fef323094184"/>
+    <p:sldId xmlns:r="http://schemas.openxmlformats.org/officeDocument/2006/relationships" id="263" r:id="R7576b10623e840e2"/>
+    <p:sldId xmlns:r="http://schemas.openxmlformats.org/officeDocument/2006/relationships" id="264" r:id="R216a47fa44064b59"/>
+    <p:sldId xmlns:r="http://schemas.openxmlformats.org/officeDocument/2006/relationships" id="265" r:id="R21a5f9d1ab01489f"/>
+    <p:sldId xmlns:r="http://schemas.openxmlformats.org/officeDocument/2006/relationships" id="266" r:id="R9608e7ea303b4af7"/>
+    <p:sldId xmlns:r="http://schemas.openxmlformats.org/officeDocument/2006/relationships" id="267" r:id="R151426d7ebb74327"/>
   </p:sldIdLst>
   <p:sldSz cx="12192000" cy="6858000"/>
   <p:notesSz cx="6858000" cy="9144000"/>
@@ -873,7 +873,7 @@
           <a:lstStyle xmlns:a="http://schemas.openxmlformats.org/drawingml/2006/main"/>
           <a:p xmlns:a="http://schemas.openxmlformats.org/drawingml/2006/main">
             <a:r>
-              <a:t>I do. Reveal the question, setup and each calculation stage one click at a time. Pupils watch before copying. Model answer: 90,000.</a:t>
+              <a:t>I do. Reveal the question, then reveal each mathematical change one click at a time. Point to the numbers and operation that changed before moving to the next line. Final answer: 90,000.</a:t>
             </a:r>
           </a:p>
         </p:txBody>
@@ -1291,7 +1291,7 @@
   </p:cSld>
   <p:clrMap bg1="lt1" tx1="dk1" bg2="lt2" tx2="dk2" accent1="accent1" accent2="accent2" accent3="accent3" accent4="accent4" accent5="accent5" accent6="accent6" hlink="hlink" folHlink="folHlink"/>
   <p:sldLayoutIdLst>
-    <p:sldLayoutId xmlns:r="http://schemas.openxmlformats.org/officeDocument/2006/relationships" id="2147483649" r:id="R3267d761e5b9466f"/>
+    <p:sldLayoutId xmlns:r="http://schemas.openxmlformats.org/officeDocument/2006/relationships" id="2147483649" r:id="R3052b0862d20439e"/>
   </p:sldLayoutIdLst>
   <p:txStyles>
     <p:titleStyle>
@@ -1842,7 +1842,7 @@
           <p:cNvPr id="12" name="">
             <a:extLst xmlns:a="http://schemas.openxmlformats.org/drawingml/2006/main">
               <a:ext uri="{FF2B5EF4-FFF2-40B4-BE49-F238E27FC236}">
-                <a16:creationId xmlns:a16="http://schemas.microsoft.com/office/drawing/2014/main" id="{190755CD-CA7A-45B1-9803-7C4872A945A5}"/>
+                <a16:creationId xmlns:a16="http://schemas.microsoft.com/office/drawing/2014/main" id="{64B40568-2A9A-46DD-BAAC-796740C7B0C0}"/>
               </a:ext>
             </a:extLst>
           </p:cNvPr>
@@ -1874,7 +1874,7 @@
           <p:cNvPr id="2" name="">
             <a:extLst xmlns:a="http://schemas.openxmlformats.org/drawingml/2006/main">
               <a:ext uri="{FF2B5EF4-FFF2-40B4-BE49-F238E27FC236}">
-                <a16:creationId xmlns:a16="http://schemas.microsoft.com/office/drawing/2014/main" id="{BFCEECC2-557F-469C-8E58-B1A380B47145}"/>
+                <a16:creationId xmlns:a16="http://schemas.microsoft.com/office/drawing/2014/main" id="{D3E1B9A6-8DF1-4835-8D27-C7BF73413BFF}"/>
               </a:ext>
             </a:extLst>
           </p:cNvPr>
@@ -1931,7 +1931,7 @@
           <p:cNvPr id="3" name="">
             <a:extLst xmlns:a="http://schemas.openxmlformats.org/drawingml/2006/main">
               <a:ext uri="{FF2B5EF4-FFF2-40B4-BE49-F238E27FC236}">
-                <a16:creationId xmlns:a16="http://schemas.microsoft.com/office/drawing/2014/main" id="{459F91CD-F4FF-4019-BE51-CD2179CED119}"/>
+                <a16:creationId xmlns:a16="http://schemas.microsoft.com/office/drawing/2014/main" id="{31C840E9-C7A4-4ABE-B774-D08262A54117}"/>
               </a:ext>
             </a:extLst>
           </p:cNvPr>
@@ -1965,7 +1965,7 @@
           <p:cNvPr id="4" name="">
             <a:extLst xmlns:a="http://schemas.openxmlformats.org/drawingml/2006/main">
               <a:ext uri="{FF2B5EF4-FFF2-40B4-BE49-F238E27FC236}">
-                <a16:creationId xmlns:a16="http://schemas.microsoft.com/office/drawing/2014/main" id="{6780802C-010D-44AA-88FB-858993E86C0D}"/>
+                <a16:creationId xmlns:a16="http://schemas.microsoft.com/office/drawing/2014/main" id="{DA9DC3CA-C50A-43F9-98A7-02C45C135706}"/>
               </a:ext>
             </a:extLst>
           </p:cNvPr>
@@ -2022,7 +2022,7 @@
           <p:cNvPr id="5" name="">
             <a:extLst xmlns:a="http://schemas.openxmlformats.org/drawingml/2006/main">
               <a:ext uri="{FF2B5EF4-FFF2-40B4-BE49-F238E27FC236}">
-                <a16:creationId xmlns:a16="http://schemas.microsoft.com/office/drawing/2014/main" id="{F7B9781F-A488-4CD9-8F98-68F5C566D7BE}"/>
+                <a16:creationId xmlns:a16="http://schemas.microsoft.com/office/drawing/2014/main" id="{C44046A0-8DF2-4B7C-B315-28081B1BE000}"/>
               </a:ext>
             </a:extLst>
           </p:cNvPr>
@@ -2079,7 +2079,7 @@
           <p:cNvPr id="6" name="">
             <a:extLst xmlns:a="http://schemas.openxmlformats.org/drawingml/2006/main">
               <a:ext uri="{FF2B5EF4-FFF2-40B4-BE49-F238E27FC236}">
-                <a16:creationId xmlns:a16="http://schemas.microsoft.com/office/drawing/2014/main" id="{CAE7898C-AE24-495F-9341-B0D5EC83F309}"/>
+                <a16:creationId xmlns:a16="http://schemas.microsoft.com/office/drawing/2014/main" id="{D6D447D3-7F62-49DB-9BD4-C4C10427EB4E}"/>
               </a:ext>
             </a:extLst>
           </p:cNvPr>
@@ -2113,7 +2113,7 @@
           <p:cNvPr id="7" name="">
             <a:extLst xmlns:a="http://schemas.openxmlformats.org/drawingml/2006/main">
               <a:ext uri="{FF2B5EF4-FFF2-40B4-BE49-F238E27FC236}">
-                <a16:creationId xmlns:a16="http://schemas.microsoft.com/office/drawing/2014/main" id="{DA6F246D-52F8-4564-84E2-A31DD29A6E6E}"/>
+                <a16:creationId xmlns:a16="http://schemas.microsoft.com/office/drawing/2014/main" id="{484FC897-84E1-401E-91D1-6A3F4C60E7D9}"/>
               </a:ext>
             </a:extLst>
           </p:cNvPr>
@@ -2170,7 +2170,7 @@
           <p:cNvPr id="8" name="">
             <a:extLst xmlns:a="http://schemas.openxmlformats.org/drawingml/2006/main">
               <a:ext uri="{FF2B5EF4-FFF2-40B4-BE49-F238E27FC236}">
-                <a16:creationId xmlns:a16="http://schemas.microsoft.com/office/drawing/2014/main" id="{0A1061D0-C9D0-4EDB-B225-9E9FF0CD1C54}"/>
+                <a16:creationId xmlns:a16="http://schemas.microsoft.com/office/drawing/2014/main" id="{EDD0D4A1-646B-483B-9ECD-57E2A35232F0}"/>
               </a:ext>
             </a:extLst>
           </p:cNvPr>
@@ -2227,7 +2227,7 @@
           <p:cNvPr id="9" name="">
             <a:extLst xmlns:a="http://schemas.openxmlformats.org/drawingml/2006/main">
               <a:ext uri="{FF2B5EF4-FFF2-40B4-BE49-F238E27FC236}">
-                <a16:creationId xmlns:a16="http://schemas.microsoft.com/office/drawing/2014/main" id="{569401B5-69F3-4C07-B6C0-1F3C5F757399}"/>
+                <a16:creationId xmlns:a16="http://schemas.microsoft.com/office/drawing/2014/main" id="{11E39EC1-D3E9-4A89-98FC-72EC78F847DB}"/>
               </a:ext>
             </a:extLst>
           </p:cNvPr>
@@ -2284,7 +2284,7 @@
           <p:cNvPr id="10" name="">
             <a:extLst xmlns:a="http://schemas.openxmlformats.org/drawingml/2006/main">
               <a:ext uri="{FF2B5EF4-FFF2-40B4-BE49-F238E27FC236}">
-                <a16:creationId xmlns:a16="http://schemas.microsoft.com/office/drawing/2014/main" id="{BC6C5180-D4B5-4EC8-9715-DAA1C457ADED}"/>
+                <a16:creationId xmlns:a16="http://schemas.microsoft.com/office/drawing/2014/main" id="{712D1FFE-B789-488E-946D-C16ADF19558C}"/>
               </a:ext>
             </a:extLst>
           </p:cNvPr>
@@ -2341,7 +2341,7 @@
           <p:cNvPr id="11" name="">
             <a:extLst xmlns:a="http://schemas.openxmlformats.org/drawingml/2006/main">
               <a:ext uri="{FF2B5EF4-FFF2-40B4-BE49-F238E27FC236}">
-                <a16:creationId xmlns:a16="http://schemas.microsoft.com/office/drawing/2014/main" id="{09D2E316-21A9-4104-B640-636EBB954170}"/>
+                <a16:creationId xmlns:a16="http://schemas.microsoft.com/office/drawing/2014/main" id="{633FDD0A-C428-436C-A021-4801F9B31F09}"/>
               </a:ext>
             </a:extLst>
           </p:cNvPr>
@@ -2396,7 +2396,7 @@
     </p:spTree>
     <p:extLst>
       <p:ext uri="{BB962C8B-B14F-4D97-AF65-F5344CB8AC3E}">
-        <p14:creationId xmlns:p14="http://schemas.microsoft.com/office/powerpoint/2010/main" val="1166833054"/>
+        <p14:creationId xmlns:p14="http://schemas.microsoft.com/office/powerpoint/2010/main" val="612891405"/>
       </p:ext>
     </p:extLst>
   </p:cSld>
@@ -2427,7 +2427,7 @@
           <p:cNvPr id="14" name="">
             <a:extLst xmlns:a="http://schemas.openxmlformats.org/drawingml/2006/main">
               <a:ext uri="{FF2B5EF4-FFF2-40B4-BE49-F238E27FC236}">
-                <a16:creationId xmlns:a16="http://schemas.microsoft.com/office/drawing/2014/main" id="{481EA603-6AD4-4AAF-B5C8-0D509B192D85}"/>
+                <a16:creationId xmlns:a16="http://schemas.microsoft.com/office/drawing/2014/main" id="{720307F1-09B7-4804-BF8F-09B943D36185}"/>
               </a:ext>
             </a:extLst>
           </p:cNvPr>
@@ -2459,7 +2459,7 @@
           <p:cNvPr id="2" name="">
             <a:extLst xmlns:a="http://schemas.openxmlformats.org/drawingml/2006/main">
               <a:ext uri="{FF2B5EF4-FFF2-40B4-BE49-F238E27FC236}">
-                <a16:creationId xmlns:a16="http://schemas.microsoft.com/office/drawing/2014/main" id="{E796961A-899E-47FF-B885-1ACCEEFB7D4A}"/>
+                <a16:creationId xmlns:a16="http://schemas.microsoft.com/office/drawing/2014/main" id="{BBFEFB48-B01C-471E-B099-6652BE772420}"/>
               </a:ext>
             </a:extLst>
           </p:cNvPr>
@@ -2516,7 +2516,7 @@
           <p:cNvPr id="3" name="">
             <a:extLst xmlns:a="http://schemas.openxmlformats.org/drawingml/2006/main">
               <a:ext uri="{FF2B5EF4-FFF2-40B4-BE49-F238E27FC236}">
-                <a16:creationId xmlns:a16="http://schemas.microsoft.com/office/drawing/2014/main" id="{C2D0BD39-2797-4C45-8309-82C00510DDF8}"/>
+                <a16:creationId xmlns:a16="http://schemas.microsoft.com/office/drawing/2014/main" id="{41C674CB-7359-423F-BE2D-1E46503E3CA8}"/>
               </a:ext>
             </a:extLst>
           </p:cNvPr>
@@ -2548,7 +2548,7 @@
           <p:cNvPr id="4" name="">
             <a:extLst xmlns:a="http://schemas.openxmlformats.org/drawingml/2006/main">
               <a:ext uri="{FF2B5EF4-FFF2-40B4-BE49-F238E27FC236}">
-                <a16:creationId xmlns:a16="http://schemas.microsoft.com/office/drawing/2014/main" id="{BD336133-A906-45B9-8420-0517BA01EA04}"/>
+                <a16:creationId xmlns:a16="http://schemas.microsoft.com/office/drawing/2014/main" id="{9D2E4054-E9CF-46A8-B8DD-D617415015B9}"/>
               </a:ext>
             </a:extLst>
           </p:cNvPr>
@@ -2605,7 +2605,7 @@
           <p:cNvPr id="5" name="">
             <a:extLst xmlns:a="http://schemas.openxmlformats.org/drawingml/2006/main">
               <a:ext uri="{FF2B5EF4-FFF2-40B4-BE49-F238E27FC236}">
-                <a16:creationId xmlns:a16="http://schemas.microsoft.com/office/drawing/2014/main" id="{9EC05DE3-CDF7-4C3C-BB21-C660C9E18045}"/>
+                <a16:creationId xmlns:a16="http://schemas.microsoft.com/office/drawing/2014/main" id="{3CE24F33-DF7F-4519-B1AE-B6AF317C28B4}"/>
               </a:ext>
             </a:extLst>
           </p:cNvPr>
@@ -2662,7 +2662,7 @@
           <p:cNvPr id="6" name="">
             <a:extLst xmlns:a="http://schemas.openxmlformats.org/drawingml/2006/main">
               <a:ext uri="{FF2B5EF4-FFF2-40B4-BE49-F238E27FC236}">
-                <a16:creationId xmlns:a16="http://schemas.microsoft.com/office/drawing/2014/main" id="{0BE5EC3E-8A52-4511-9423-BA3B98208834}"/>
+                <a16:creationId xmlns:a16="http://schemas.microsoft.com/office/drawing/2014/main" id="{DB0092E0-0323-45B6-879D-D653864B4F2A}"/>
               </a:ext>
             </a:extLst>
           </p:cNvPr>
@@ -2719,7 +2719,7 @@
           <p:cNvPr id="7" name="">
             <a:extLst xmlns:a="http://schemas.openxmlformats.org/drawingml/2006/main">
               <a:ext uri="{FF2B5EF4-FFF2-40B4-BE49-F238E27FC236}">
-                <a16:creationId xmlns:a16="http://schemas.microsoft.com/office/drawing/2014/main" id="{33B63959-1F72-42AC-9B97-95DE080DA5B1}"/>
+                <a16:creationId xmlns:a16="http://schemas.microsoft.com/office/drawing/2014/main" id="{91EA0114-B23F-4C3B-85B5-4EC1D8DF425E}"/>
               </a:ext>
             </a:extLst>
           </p:cNvPr>
@@ -2751,7 +2751,7 @@
           <p:cNvPr id="8" name="">
             <a:extLst xmlns:a="http://schemas.openxmlformats.org/drawingml/2006/main">
               <a:ext uri="{FF2B5EF4-FFF2-40B4-BE49-F238E27FC236}">
-                <a16:creationId xmlns:a16="http://schemas.microsoft.com/office/drawing/2014/main" id="{46AFEB42-9F1E-497D-A4CE-2EA08F7C5455}"/>
+                <a16:creationId xmlns:a16="http://schemas.microsoft.com/office/drawing/2014/main" id="{1D878C11-770C-4ADB-958A-86A931F236F6}"/>
               </a:ext>
             </a:extLst>
           </p:cNvPr>
@@ -2808,7 +2808,7 @@
           <p:cNvPr id="9" name="">
             <a:extLst xmlns:a="http://schemas.openxmlformats.org/drawingml/2006/main">
               <a:ext uri="{FF2B5EF4-FFF2-40B4-BE49-F238E27FC236}">
-                <a16:creationId xmlns:a16="http://schemas.microsoft.com/office/drawing/2014/main" id="{9D3AE3AF-1395-4C44-8527-72EE34331F26}"/>
+                <a16:creationId xmlns:a16="http://schemas.microsoft.com/office/drawing/2014/main" id="{2ED8275A-CEED-4F31-AB0E-6BEDC7C16256}"/>
               </a:ext>
             </a:extLst>
           </p:cNvPr>
@@ -2865,7 +2865,7 @@
           <p:cNvPr id="10" name="">
             <a:extLst xmlns:a="http://schemas.openxmlformats.org/drawingml/2006/main">
               <a:ext uri="{FF2B5EF4-FFF2-40B4-BE49-F238E27FC236}">
-                <a16:creationId xmlns:a16="http://schemas.microsoft.com/office/drawing/2014/main" id="{42C27DA7-D4F3-4EDF-BA22-91CB229E5184}"/>
+                <a16:creationId xmlns:a16="http://schemas.microsoft.com/office/drawing/2014/main" id="{4AB9E037-0A23-425D-9C0E-817D8CA4D1B1}"/>
               </a:ext>
             </a:extLst>
           </p:cNvPr>
@@ -2922,7 +2922,7 @@
           <p:cNvPr id="11" name="">
             <a:extLst xmlns:a="http://schemas.openxmlformats.org/drawingml/2006/main">
               <a:ext uri="{FF2B5EF4-FFF2-40B4-BE49-F238E27FC236}">
-                <a16:creationId xmlns:a16="http://schemas.microsoft.com/office/drawing/2014/main" id="{42BDB4F9-58A6-4806-9EB4-F3AC05ECA21F}"/>
+                <a16:creationId xmlns:a16="http://schemas.microsoft.com/office/drawing/2014/main" id="{D71D961E-5991-474A-90EB-FBAB95A66983}"/>
               </a:ext>
             </a:extLst>
           </p:cNvPr>
@@ -2979,7 +2979,7 @@
           <p:cNvPr id="12" name="">
             <a:extLst xmlns:a="http://schemas.openxmlformats.org/drawingml/2006/main">
               <a:ext uri="{FF2B5EF4-FFF2-40B4-BE49-F238E27FC236}">
-                <a16:creationId xmlns:a16="http://schemas.microsoft.com/office/drawing/2014/main" id="{13D2C1E5-7F3D-48EF-9953-1CC2437E114A}"/>
+                <a16:creationId xmlns:a16="http://schemas.microsoft.com/office/drawing/2014/main" id="{0EA35D75-D52C-44D2-BFAE-EF9D43BD0989}"/>
               </a:ext>
             </a:extLst>
           </p:cNvPr>
@@ -3036,7 +3036,7 @@
           <p:cNvPr id="13" name="">
             <a:extLst xmlns:a="http://schemas.openxmlformats.org/drawingml/2006/main">
               <a:ext uri="{FF2B5EF4-FFF2-40B4-BE49-F238E27FC236}">
-                <a16:creationId xmlns:a16="http://schemas.microsoft.com/office/drawing/2014/main" id="{59DD95FD-44E7-4DC4-AD1C-F93FEBF3CF61}"/>
+                <a16:creationId xmlns:a16="http://schemas.microsoft.com/office/drawing/2014/main" id="{1EC236DE-BA24-4BA6-8E3A-9386DAB3B160}"/>
               </a:ext>
             </a:extLst>
           </p:cNvPr>
@@ -3091,7 +3091,7 @@
     </p:spTree>
     <p:extLst>
       <p:ext uri="{BB962C8B-B14F-4D97-AF65-F5344CB8AC3E}">
-        <p14:creationId xmlns:p14="http://schemas.microsoft.com/office/powerpoint/2010/main" val="1572200242"/>
+        <p14:creationId xmlns:p14="http://schemas.microsoft.com/office/powerpoint/2010/main" val="1805891801"/>
       </p:ext>
     </p:extLst>
   </p:cSld>
@@ -3292,7 +3292,7 @@
           <p:cNvPr id="19" name="">
             <a:extLst xmlns:a="http://schemas.openxmlformats.org/drawingml/2006/main">
               <a:ext uri="{FF2B5EF4-FFF2-40B4-BE49-F238E27FC236}">
-                <a16:creationId xmlns:a16="http://schemas.microsoft.com/office/drawing/2014/main" id="{D53E259E-0931-4C39-9B75-4E9F2618254F}"/>
+                <a16:creationId xmlns:a16="http://schemas.microsoft.com/office/drawing/2014/main" id="{5347414E-5575-4FCB-A1B0-39C4897474E1}"/>
               </a:ext>
             </a:extLst>
           </p:cNvPr>
@@ -3324,7 +3324,7 @@
           <p:cNvPr id="2" name="">
             <a:extLst xmlns:a="http://schemas.openxmlformats.org/drawingml/2006/main">
               <a:ext uri="{FF2B5EF4-FFF2-40B4-BE49-F238E27FC236}">
-                <a16:creationId xmlns:a16="http://schemas.microsoft.com/office/drawing/2014/main" id="{DFD16369-43F4-4E6A-B19A-8E4394DB760D}"/>
+                <a16:creationId xmlns:a16="http://schemas.microsoft.com/office/drawing/2014/main" id="{79EE2665-4FA6-4446-BF85-DECA71D712FB}"/>
               </a:ext>
             </a:extLst>
           </p:cNvPr>
@@ -3381,7 +3381,7 @@
           <p:cNvPr id="3" name="">
             <a:extLst xmlns:a="http://schemas.openxmlformats.org/drawingml/2006/main">
               <a:ext uri="{FF2B5EF4-FFF2-40B4-BE49-F238E27FC236}">
-                <a16:creationId xmlns:a16="http://schemas.microsoft.com/office/drawing/2014/main" id="{DBF47FC0-75FE-4058-A8FC-9340BECB43CE}"/>
+                <a16:creationId xmlns:a16="http://schemas.microsoft.com/office/drawing/2014/main" id="{E6348E72-08B3-45B5-A7CD-00A719DC138D}"/>
               </a:ext>
             </a:extLst>
           </p:cNvPr>
@@ -3413,7 +3413,7 @@
           <p:cNvPr id="4" name="">
             <a:extLst xmlns:a="http://schemas.openxmlformats.org/drawingml/2006/main">
               <a:ext uri="{FF2B5EF4-FFF2-40B4-BE49-F238E27FC236}">
-                <a16:creationId xmlns:a16="http://schemas.microsoft.com/office/drawing/2014/main" id="{4D83C615-48B7-43AE-A0BE-793AA21463E1}"/>
+                <a16:creationId xmlns:a16="http://schemas.microsoft.com/office/drawing/2014/main" id="{7C56E4FA-34FA-4BFE-A64C-94D8BD2C1EA1}"/>
               </a:ext>
             </a:extLst>
           </p:cNvPr>
@@ -3470,7 +3470,7 @@
           <p:cNvPr id="5" name="">
             <a:extLst xmlns:a="http://schemas.openxmlformats.org/drawingml/2006/main">
               <a:ext uri="{FF2B5EF4-FFF2-40B4-BE49-F238E27FC236}">
-                <a16:creationId xmlns:a16="http://schemas.microsoft.com/office/drawing/2014/main" id="{7ED60DF1-898E-41FF-A167-384AD63EEABD}"/>
+                <a16:creationId xmlns:a16="http://schemas.microsoft.com/office/drawing/2014/main" id="{F20629B2-A8E1-4557-AC8E-FC7D85CF92E3}"/>
               </a:ext>
             </a:extLst>
           </p:cNvPr>
@@ -3527,7 +3527,7 @@
           <p:cNvPr id="6" name="">
             <a:extLst xmlns:a="http://schemas.openxmlformats.org/drawingml/2006/main">
               <a:ext uri="{FF2B5EF4-FFF2-40B4-BE49-F238E27FC236}">
-                <a16:creationId xmlns:a16="http://schemas.microsoft.com/office/drawing/2014/main" id="{3DBAD28B-B633-421D-84A7-BA7BFC1FA84A}"/>
+                <a16:creationId xmlns:a16="http://schemas.microsoft.com/office/drawing/2014/main" id="{347E264C-9FC3-48DA-9721-5DB466B13E85}"/>
               </a:ext>
             </a:extLst>
           </p:cNvPr>
@@ -3584,7 +3584,7 @@
           <p:cNvPr id="7" name="">
             <a:extLst xmlns:a="http://schemas.openxmlformats.org/drawingml/2006/main">
               <a:ext uri="{FF2B5EF4-FFF2-40B4-BE49-F238E27FC236}">
-                <a16:creationId xmlns:a16="http://schemas.microsoft.com/office/drawing/2014/main" id="{95C165E8-BAB6-4BA1-9313-4024645A2BD6}"/>
+                <a16:creationId xmlns:a16="http://schemas.microsoft.com/office/drawing/2014/main" id="{07401462-5A1C-407F-95D1-41A59FFEE1AD}"/>
               </a:ext>
             </a:extLst>
           </p:cNvPr>
@@ -3616,7 +3616,7 @@
           <p:cNvPr id="8" name="">
             <a:extLst xmlns:a="http://schemas.openxmlformats.org/drawingml/2006/main">
               <a:ext uri="{FF2B5EF4-FFF2-40B4-BE49-F238E27FC236}">
-                <a16:creationId xmlns:a16="http://schemas.microsoft.com/office/drawing/2014/main" id="{F1794C1B-88AA-4E26-9348-3204FC84C5AC}"/>
+                <a16:creationId xmlns:a16="http://schemas.microsoft.com/office/drawing/2014/main" id="{D05FF7A8-07A4-45D3-8FE7-EFFB6A7A6638}"/>
               </a:ext>
             </a:extLst>
           </p:cNvPr>
@@ -3673,7 +3673,7 @@
           <p:cNvPr id="9" name="">
             <a:extLst xmlns:a="http://schemas.openxmlformats.org/drawingml/2006/main">
               <a:ext uri="{FF2B5EF4-FFF2-40B4-BE49-F238E27FC236}">
-                <a16:creationId xmlns:a16="http://schemas.microsoft.com/office/drawing/2014/main" id="{565D4B23-25D7-4814-AB7E-89073D3A3544}"/>
+                <a16:creationId xmlns:a16="http://schemas.microsoft.com/office/drawing/2014/main" id="{5C5A528B-6B4C-4BAD-ADE1-1AFB64EF08AE}"/>
               </a:ext>
             </a:extLst>
           </p:cNvPr>
@@ -3730,7 +3730,7 @@
           <p:cNvPr id="10" name="">
             <a:extLst xmlns:a="http://schemas.openxmlformats.org/drawingml/2006/main">
               <a:ext uri="{FF2B5EF4-FFF2-40B4-BE49-F238E27FC236}">
-                <a16:creationId xmlns:a16="http://schemas.microsoft.com/office/drawing/2014/main" id="{0B1E4954-08AC-4A4A-8F88-FB835BF63CB7}"/>
+                <a16:creationId xmlns:a16="http://schemas.microsoft.com/office/drawing/2014/main" id="{E58CB5E1-413C-4A72-B66E-2265F53CB47E}"/>
               </a:ext>
             </a:extLst>
           </p:cNvPr>
@@ -3787,7 +3787,7 @@
           <p:cNvPr id="11" name="">
             <a:extLst xmlns:a="http://schemas.openxmlformats.org/drawingml/2006/main">
               <a:ext uri="{FF2B5EF4-FFF2-40B4-BE49-F238E27FC236}">
-                <a16:creationId xmlns:a16="http://schemas.microsoft.com/office/drawing/2014/main" id="{6E922370-0F7B-4CAD-B8BB-8F79463A181F}"/>
+                <a16:creationId xmlns:a16="http://schemas.microsoft.com/office/drawing/2014/main" id="{13A03C36-9501-4984-9BBC-0B97892ABA0E}"/>
               </a:ext>
             </a:extLst>
           </p:cNvPr>
@@ -3821,7 +3821,7 @@
           <p:cNvPr id="12" name="">
             <a:extLst xmlns:a="http://schemas.openxmlformats.org/drawingml/2006/main">
               <a:ext uri="{FF2B5EF4-FFF2-40B4-BE49-F238E27FC236}">
-                <a16:creationId xmlns:a16="http://schemas.microsoft.com/office/drawing/2014/main" id="{308D13BE-FAD0-4F49-B90A-CFB3FA8FC7BD}"/>
+                <a16:creationId xmlns:a16="http://schemas.microsoft.com/office/drawing/2014/main" id="{290B8B04-AAF6-4CE5-9A25-4A3D65FB39B7}"/>
               </a:ext>
             </a:extLst>
           </p:cNvPr>
@@ -3878,7 +3878,7 @@
           <p:cNvPr id="13" name="">
             <a:extLst xmlns:a="http://schemas.openxmlformats.org/drawingml/2006/main">
               <a:ext uri="{FF2B5EF4-FFF2-40B4-BE49-F238E27FC236}">
-                <a16:creationId xmlns:a16="http://schemas.microsoft.com/office/drawing/2014/main" id="{2901EB8F-D5DC-4B79-8D79-680ACDB13B54}"/>
+                <a16:creationId xmlns:a16="http://schemas.microsoft.com/office/drawing/2014/main" id="{72B31612-82E9-4F08-8B55-81EC75A49952}"/>
               </a:ext>
             </a:extLst>
           </p:cNvPr>
@@ -3935,7 +3935,7 @@
           <p:cNvPr id="14" name="">
             <a:extLst xmlns:a="http://schemas.openxmlformats.org/drawingml/2006/main">
               <a:ext uri="{FF2B5EF4-FFF2-40B4-BE49-F238E27FC236}">
-                <a16:creationId xmlns:a16="http://schemas.microsoft.com/office/drawing/2014/main" id="{6705C1ED-42E7-4799-A3DE-52BD2D24BB5F}"/>
+                <a16:creationId xmlns:a16="http://schemas.microsoft.com/office/drawing/2014/main" id="{6944E6AE-2BAF-41B7-A823-4503C9101341}"/>
               </a:ext>
             </a:extLst>
           </p:cNvPr>
@@ -3992,7 +3992,7 @@
           <p:cNvPr id="15" name="">
             <a:extLst xmlns:a="http://schemas.openxmlformats.org/drawingml/2006/main">
               <a:ext uri="{FF2B5EF4-FFF2-40B4-BE49-F238E27FC236}">
-                <a16:creationId xmlns:a16="http://schemas.microsoft.com/office/drawing/2014/main" id="{26511618-39F3-4EE8-9250-EB66F2B4CF91}"/>
+                <a16:creationId xmlns:a16="http://schemas.microsoft.com/office/drawing/2014/main" id="{A29DDC3B-DBBF-4D7C-B274-DE0061AE760C}"/>
               </a:ext>
             </a:extLst>
           </p:cNvPr>
@@ -4026,7 +4026,7 @@
           <p:cNvPr id="16" name="">
             <a:extLst xmlns:a="http://schemas.openxmlformats.org/drawingml/2006/main">
               <a:ext uri="{FF2B5EF4-FFF2-40B4-BE49-F238E27FC236}">
-                <a16:creationId xmlns:a16="http://schemas.microsoft.com/office/drawing/2014/main" id="{712283C9-077A-413B-8A73-C8931BE0608E}"/>
+                <a16:creationId xmlns:a16="http://schemas.microsoft.com/office/drawing/2014/main" id="{673E89C1-85C4-450B-95ED-3EFCA0269062}"/>
               </a:ext>
             </a:extLst>
           </p:cNvPr>
@@ -4083,7 +4083,7 @@
           <p:cNvPr id="17" name="">
             <a:extLst xmlns:a="http://schemas.openxmlformats.org/drawingml/2006/main">
               <a:ext uri="{FF2B5EF4-FFF2-40B4-BE49-F238E27FC236}">
-                <a16:creationId xmlns:a16="http://schemas.microsoft.com/office/drawing/2014/main" id="{4FFFF182-D81A-4C5B-A7B4-FD1347D7B6F6}"/>
+                <a16:creationId xmlns:a16="http://schemas.microsoft.com/office/drawing/2014/main" id="{FBF7454E-F12A-4914-8AFE-F7498A0C51B6}"/>
               </a:ext>
             </a:extLst>
           </p:cNvPr>
@@ -4140,7 +4140,7 @@
           <p:cNvPr id="18" name="">
             <a:extLst xmlns:a="http://schemas.openxmlformats.org/drawingml/2006/main">
               <a:ext uri="{FF2B5EF4-FFF2-40B4-BE49-F238E27FC236}">
-                <a16:creationId xmlns:a16="http://schemas.microsoft.com/office/drawing/2014/main" id="{E09C18B1-4253-411B-817D-F4367C281A2C}"/>
+                <a16:creationId xmlns:a16="http://schemas.microsoft.com/office/drawing/2014/main" id="{8A22E705-04B2-4AAE-9985-6DFA4F927A47}"/>
               </a:ext>
             </a:extLst>
           </p:cNvPr>
@@ -4195,7 +4195,7 @@
     </p:spTree>
     <p:extLst>
       <p:ext uri="{BB962C8B-B14F-4D97-AF65-F5344CB8AC3E}">
-        <p14:creationId xmlns:p14="http://schemas.microsoft.com/office/powerpoint/2010/main" val="693755170"/>
+        <p14:creationId xmlns:p14="http://schemas.microsoft.com/office/powerpoint/2010/main" val="710222634"/>
       </p:ext>
     </p:extLst>
   </p:cSld>
@@ -4350,7 +4350,7 @@
           <p:cNvPr id="23" name="">
             <a:extLst xmlns:a="http://schemas.openxmlformats.org/drawingml/2006/main">
               <a:ext uri="{FF2B5EF4-FFF2-40B4-BE49-F238E27FC236}">
-                <a16:creationId xmlns:a16="http://schemas.microsoft.com/office/drawing/2014/main" id="{0067ECF0-5DED-40DB-913C-4483DD77CD02}"/>
+                <a16:creationId xmlns:a16="http://schemas.microsoft.com/office/drawing/2014/main" id="{3DBB98B6-C7D7-4A88-A697-E65D88A264BD}"/>
               </a:ext>
             </a:extLst>
           </p:cNvPr>
@@ -4382,7 +4382,7 @@
           <p:cNvPr id="2" name="">
             <a:extLst xmlns:a="http://schemas.openxmlformats.org/drawingml/2006/main">
               <a:ext uri="{FF2B5EF4-FFF2-40B4-BE49-F238E27FC236}">
-                <a16:creationId xmlns:a16="http://schemas.microsoft.com/office/drawing/2014/main" id="{66C1AC0B-81D0-47EA-A322-B96F891CAA9C}"/>
+                <a16:creationId xmlns:a16="http://schemas.microsoft.com/office/drawing/2014/main" id="{B08D4576-D4F0-4F83-9FC0-235294AFBA60}"/>
               </a:ext>
             </a:extLst>
           </p:cNvPr>
@@ -4439,7 +4439,7 @@
           <p:cNvPr id="3" name="">
             <a:extLst xmlns:a="http://schemas.openxmlformats.org/drawingml/2006/main">
               <a:ext uri="{FF2B5EF4-FFF2-40B4-BE49-F238E27FC236}">
-                <a16:creationId xmlns:a16="http://schemas.microsoft.com/office/drawing/2014/main" id="{0F0DA5E1-A506-4984-967B-00A65CE359AA}"/>
+                <a16:creationId xmlns:a16="http://schemas.microsoft.com/office/drawing/2014/main" id="{B43D07D8-DE52-4CBE-9778-309D34031123}"/>
               </a:ext>
             </a:extLst>
           </p:cNvPr>
@@ -4471,7 +4471,7 @@
           <p:cNvPr id="4" name="">
             <a:extLst xmlns:a="http://schemas.openxmlformats.org/drawingml/2006/main">
               <a:ext uri="{FF2B5EF4-FFF2-40B4-BE49-F238E27FC236}">
-                <a16:creationId xmlns:a16="http://schemas.microsoft.com/office/drawing/2014/main" id="{C053F432-C06D-4164-A225-342D05B2C758}"/>
+                <a16:creationId xmlns:a16="http://schemas.microsoft.com/office/drawing/2014/main" id="{ED3EA609-E333-4B76-8417-37ACB3B8A0BA}"/>
               </a:ext>
             </a:extLst>
           </p:cNvPr>
@@ -4528,7 +4528,7 @@
           <p:cNvPr id="5" name="">
             <a:extLst xmlns:a="http://schemas.openxmlformats.org/drawingml/2006/main">
               <a:ext uri="{FF2B5EF4-FFF2-40B4-BE49-F238E27FC236}">
-                <a16:creationId xmlns:a16="http://schemas.microsoft.com/office/drawing/2014/main" id="{31E3A5D1-309E-498D-99E5-D96557CF9C42}"/>
+                <a16:creationId xmlns:a16="http://schemas.microsoft.com/office/drawing/2014/main" id="{838976DA-7B9C-46D7-94B0-CF39936B4B1E}"/>
               </a:ext>
             </a:extLst>
           </p:cNvPr>
@@ -4585,7 +4585,7 @@
           <p:cNvPr id="6" name="">
             <a:extLst xmlns:a="http://schemas.openxmlformats.org/drawingml/2006/main">
               <a:ext uri="{FF2B5EF4-FFF2-40B4-BE49-F238E27FC236}">
-                <a16:creationId xmlns:a16="http://schemas.microsoft.com/office/drawing/2014/main" id="{7568CB10-DE3D-4522-8248-28FD6EF1FE31}"/>
+                <a16:creationId xmlns:a16="http://schemas.microsoft.com/office/drawing/2014/main" id="{474798F5-3D57-4A2B-878F-A904D2F6EE2C}"/>
               </a:ext>
             </a:extLst>
           </p:cNvPr>
@@ -4642,7 +4642,7 @@
           <p:cNvPr id="7" name="">
             <a:extLst xmlns:a="http://schemas.openxmlformats.org/drawingml/2006/main">
               <a:ext uri="{FF2B5EF4-FFF2-40B4-BE49-F238E27FC236}">
-                <a16:creationId xmlns:a16="http://schemas.microsoft.com/office/drawing/2014/main" id="{EEA509F6-E595-4073-88AF-C260A82BDE6A}"/>
+                <a16:creationId xmlns:a16="http://schemas.microsoft.com/office/drawing/2014/main" id="{89E670A5-DF3B-40FE-A18C-C092FC450AC9}"/>
               </a:ext>
             </a:extLst>
           </p:cNvPr>
@@ -4674,7 +4674,7 @@
           <p:cNvPr id="8" name="">
             <a:extLst xmlns:a="http://schemas.openxmlformats.org/drawingml/2006/main">
               <a:ext uri="{FF2B5EF4-FFF2-40B4-BE49-F238E27FC236}">
-                <a16:creationId xmlns:a16="http://schemas.microsoft.com/office/drawing/2014/main" id="{A882C402-04AE-445D-846B-AEFB52A93EC8}"/>
+                <a16:creationId xmlns:a16="http://schemas.microsoft.com/office/drawing/2014/main" id="{193C3467-5B6A-43A2-A4E3-ED36A3F6E868}"/>
               </a:ext>
             </a:extLst>
           </p:cNvPr>
@@ -4731,7 +4731,7 @@
           <p:cNvPr id="9" name="">
             <a:extLst xmlns:a="http://schemas.openxmlformats.org/drawingml/2006/main">
               <a:ext uri="{FF2B5EF4-FFF2-40B4-BE49-F238E27FC236}">
-                <a16:creationId xmlns:a16="http://schemas.microsoft.com/office/drawing/2014/main" id="{3D197F74-63DF-4766-B98C-DC769F9D1DD3}"/>
+                <a16:creationId xmlns:a16="http://schemas.microsoft.com/office/drawing/2014/main" id="{80BF505C-A6DA-4839-9BF5-E01431AFE99B}"/>
               </a:ext>
             </a:extLst>
           </p:cNvPr>
@@ -4788,7 +4788,7 @@
           <p:cNvPr id="10" name="">
             <a:extLst xmlns:a="http://schemas.openxmlformats.org/drawingml/2006/main">
               <a:ext uri="{FF2B5EF4-FFF2-40B4-BE49-F238E27FC236}">
-                <a16:creationId xmlns:a16="http://schemas.microsoft.com/office/drawing/2014/main" id="{EEC232F0-8E08-4833-840D-09172777CD32}"/>
+                <a16:creationId xmlns:a16="http://schemas.microsoft.com/office/drawing/2014/main" id="{01831DCB-1A6C-4E6B-B809-B0F1212C841C}"/>
               </a:ext>
             </a:extLst>
           </p:cNvPr>
@@ -4822,7 +4822,7 @@
           <p:cNvPr id="11" name="">
             <a:extLst xmlns:a="http://schemas.openxmlformats.org/drawingml/2006/main">
               <a:ext uri="{FF2B5EF4-FFF2-40B4-BE49-F238E27FC236}">
-                <a16:creationId xmlns:a16="http://schemas.microsoft.com/office/drawing/2014/main" id="{8951E4A2-A633-4BA3-9E67-B6AA9AFD90DF}"/>
+                <a16:creationId xmlns:a16="http://schemas.microsoft.com/office/drawing/2014/main" id="{161E0812-E7F5-445F-A01F-C3C6AB51791B}"/>
               </a:ext>
             </a:extLst>
           </p:cNvPr>
@@ -4854,7 +4854,7 @@
           <p:cNvPr id="12" name="">
             <a:extLst xmlns:a="http://schemas.openxmlformats.org/drawingml/2006/main">
               <a:ext uri="{FF2B5EF4-FFF2-40B4-BE49-F238E27FC236}">
-                <a16:creationId xmlns:a16="http://schemas.microsoft.com/office/drawing/2014/main" id="{316A787F-5C91-44DA-A88A-37652DF0F889}"/>
+                <a16:creationId xmlns:a16="http://schemas.microsoft.com/office/drawing/2014/main" id="{C370265E-3C6D-4A7D-A3FE-2DE3B5A45390}"/>
               </a:ext>
             </a:extLst>
           </p:cNvPr>
@@ -4911,7 +4911,7 @@
           <p:cNvPr id="13" name="">
             <a:extLst xmlns:a="http://schemas.openxmlformats.org/drawingml/2006/main">
               <a:ext uri="{FF2B5EF4-FFF2-40B4-BE49-F238E27FC236}">
-                <a16:creationId xmlns:a16="http://schemas.microsoft.com/office/drawing/2014/main" id="{0765F270-016D-4EF6-982F-90EBE432405B}"/>
+                <a16:creationId xmlns:a16="http://schemas.microsoft.com/office/drawing/2014/main" id="{6312A4AD-4468-4075-A112-57C492EF6C12}"/>
               </a:ext>
             </a:extLst>
           </p:cNvPr>
@@ -4968,7 +4968,7 @@
           <p:cNvPr id="14" name="">
             <a:extLst xmlns:a="http://schemas.openxmlformats.org/drawingml/2006/main">
               <a:ext uri="{FF2B5EF4-FFF2-40B4-BE49-F238E27FC236}">
-                <a16:creationId xmlns:a16="http://schemas.microsoft.com/office/drawing/2014/main" id="{20F4D0ED-F864-41BE-BF32-7413A8A2D63A}"/>
+                <a16:creationId xmlns:a16="http://schemas.microsoft.com/office/drawing/2014/main" id="{AF3C8CAF-8C20-4A68-B5B1-E8554EED23AB}"/>
               </a:ext>
             </a:extLst>
           </p:cNvPr>
@@ -5002,7 +5002,7 @@
           <p:cNvPr id="15" name="">
             <a:extLst xmlns:a="http://schemas.openxmlformats.org/drawingml/2006/main">
               <a:ext uri="{FF2B5EF4-FFF2-40B4-BE49-F238E27FC236}">
-                <a16:creationId xmlns:a16="http://schemas.microsoft.com/office/drawing/2014/main" id="{85542BA2-D57F-4956-84ED-D14B8EEDE950}"/>
+                <a16:creationId xmlns:a16="http://schemas.microsoft.com/office/drawing/2014/main" id="{196A3E6B-1E32-4F2B-BE19-B565F9E04973}"/>
               </a:ext>
             </a:extLst>
           </p:cNvPr>
@@ -5034,7 +5034,7 @@
           <p:cNvPr id="16" name="">
             <a:extLst xmlns:a="http://schemas.openxmlformats.org/drawingml/2006/main">
               <a:ext uri="{FF2B5EF4-FFF2-40B4-BE49-F238E27FC236}">
-                <a16:creationId xmlns:a16="http://schemas.microsoft.com/office/drawing/2014/main" id="{96F2633E-2907-4386-9B89-1CBBB8F04921}"/>
+                <a16:creationId xmlns:a16="http://schemas.microsoft.com/office/drawing/2014/main" id="{571D79FD-64B1-48D1-8D91-33DCA7C3DB42}"/>
               </a:ext>
             </a:extLst>
           </p:cNvPr>
@@ -5091,7 +5091,7 @@
           <p:cNvPr id="17" name="">
             <a:extLst xmlns:a="http://schemas.openxmlformats.org/drawingml/2006/main">
               <a:ext uri="{FF2B5EF4-FFF2-40B4-BE49-F238E27FC236}">
-                <a16:creationId xmlns:a16="http://schemas.microsoft.com/office/drawing/2014/main" id="{738ECCB3-6A50-4451-97EF-59CAABF8E632}"/>
+                <a16:creationId xmlns:a16="http://schemas.microsoft.com/office/drawing/2014/main" id="{3B3D0513-7A6B-4128-A476-92C84FE99E14}"/>
               </a:ext>
             </a:extLst>
           </p:cNvPr>
@@ -5148,7 +5148,7 @@
           <p:cNvPr id="18" name="">
             <a:extLst xmlns:a="http://schemas.openxmlformats.org/drawingml/2006/main">
               <a:ext uri="{FF2B5EF4-FFF2-40B4-BE49-F238E27FC236}">
-                <a16:creationId xmlns:a16="http://schemas.microsoft.com/office/drawing/2014/main" id="{70C9A56B-2745-4EFC-80C4-810D0F2181CC}"/>
+                <a16:creationId xmlns:a16="http://schemas.microsoft.com/office/drawing/2014/main" id="{89E43952-1CA0-4B0C-A8DB-6A57B3572DB9}"/>
               </a:ext>
             </a:extLst>
           </p:cNvPr>
@@ -5182,7 +5182,7 @@
           <p:cNvPr id="19" name="">
             <a:extLst xmlns:a="http://schemas.openxmlformats.org/drawingml/2006/main">
               <a:ext uri="{FF2B5EF4-FFF2-40B4-BE49-F238E27FC236}">
-                <a16:creationId xmlns:a16="http://schemas.microsoft.com/office/drawing/2014/main" id="{CFE2C0D0-B57F-40ED-922A-1117A8272CA2}"/>
+                <a16:creationId xmlns:a16="http://schemas.microsoft.com/office/drawing/2014/main" id="{C4BBDE73-7B56-4092-ABF7-A2D372ED3FBA}"/>
               </a:ext>
             </a:extLst>
           </p:cNvPr>
@@ -5214,7 +5214,7 @@
           <p:cNvPr id="20" name="">
             <a:extLst xmlns:a="http://schemas.openxmlformats.org/drawingml/2006/main">
               <a:ext uri="{FF2B5EF4-FFF2-40B4-BE49-F238E27FC236}">
-                <a16:creationId xmlns:a16="http://schemas.microsoft.com/office/drawing/2014/main" id="{EB11BF90-6256-456C-A398-5CCB42A3E32C}"/>
+                <a16:creationId xmlns:a16="http://schemas.microsoft.com/office/drawing/2014/main" id="{3D1B5A60-DFEC-4251-9368-4B7184544B9A}"/>
               </a:ext>
             </a:extLst>
           </p:cNvPr>
@@ -5271,7 +5271,7 @@
           <p:cNvPr id="21" name="">
             <a:extLst xmlns:a="http://schemas.openxmlformats.org/drawingml/2006/main">
               <a:ext uri="{FF2B5EF4-FFF2-40B4-BE49-F238E27FC236}">
-                <a16:creationId xmlns:a16="http://schemas.microsoft.com/office/drawing/2014/main" id="{EE346630-BE42-4000-B182-1C81F5E90A0E}"/>
+                <a16:creationId xmlns:a16="http://schemas.microsoft.com/office/drawing/2014/main" id="{840227FB-D757-461A-AA0D-283A99AD7343}"/>
               </a:ext>
             </a:extLst>
           </p:cNvPr>
@@ -5328,7 +5328,7 @@
           <p:cNvPr id="22" name="">
             <a:extLst xmlns:a="http://schemas.openxmlformats.org/drawingml/2006/main">
               <a:ext uri="{FF2B5EF4-FFF2-40B4-BE49-F238E27FC236}">
-                <a16:creationId xmlns:a16="http://schemas.microsoft.com/office/drawing/2014/main" id="{2C297862-C72D-487B-8887-C023668B653A}"/>
+                <a16:creationId xmlns:a16="http://schemas.microsoft.com/office/drawing/2014/main" id="{A1F826E8-EF7E-46AF-823F-E4B4B49C4B2C}"/>
               </a:ext>
             </a:extLst>
           </p:cNvPr>
@@ -5383,7 +5383,7 @@
     </p:spTree>
     <p:extLst>
       <p:ext uri="{BB962C8B-B14F-4D97-AF65-F5344CB8AC3E}">
-        <p14:creationId xmlns:p14="http://schemas.microsoft.com/office/powerpoint/2010/main" val="1466911046"/>
+        <p14:creationId xmlns:p14="http://schemas.microsoft.com/office/powerpoint/2010/main" val="441374391"/>
       </p:ext>
     </p:extLst>
   </p:cSld>
@@ -5584,7 +5584,7 @@
           <p:cNvPr id="23" name="">
             <a:extLst xmlns:a="http://schemas.openxmlformats.org/drawingml/2006/main">
               <a:ext uri="{FF2B5EF4-FFF2-40B4-BE49-F238E27FC236}">
-                <a16:creationId xmlns:a16="http://schemas.microsoft.com/office/drawing/2014/main" id="{F567E23C-A770-42C1-B6FF-63DF539DE79F}"/>
+                <a16:creationId xmlns:a16="http://schemas.microsoft.com/office/drawing/2014/main" id="{D6995584-4C8C-4F6A-BC34-6DD55B6C8A9D}"/>
               </a:ext>
             </a:extLst>
           </p:cNvPr>
@@ -5616,7 +5616,7 @@
           <p:cNvPr id="2" name="">
             <a:extLst xmlns:a="http://schemas.openxmlformats.org/drawingml/2006/main">
               <a:ext uri="{FF2B5EF4-FFF2-40B4-BE49-F238E27FC236}">
-                <a16:creationId xmlns:a16="http://schemas.microsoft.com/office/drawing/2014/main" id="{1E30A376-6688-435A-9F65-9E5B0936C95B}"/>
+                <a16:creationId xmlns:a16="http://schemas.microsoft.com/office/drawing/2014/main" id="{04DA2890-707D-4D23-BE15-25CE70706916}"/>
               </a:ext>
             </a:extLst>
           </p:cNvPr>
@@ -5673,7 +5673,7 @@
           <p:cNvPr id="3" name="">
             <a:extLst xmlns:a="http://schemas.openxmlformats.org/drawingml/2006/main">
               <a:ext uri="{FF2B5EF4-FFF2-40B4-BE49-F238E27FC236}">
-                <a16:creationId xmlns:a16="http://schemas.microsoft.com/office/drawing/2014/main" id="{2E83B347-362B-4BB9-9A0F-3F2145293FE7}"/>
+                <a16:creationId xmlns:a16="http://schemas.microsoft.com/office/drawing/2014/main" id="{5CFF6EF6-2025-425B-940E-60B209DE82FF}"/>
               </a:ext>
             </a:extLst>
           </p:cNvPr>
@@ -5705,7 +5705,7 @@
           <p:cNvPr id="4" name="">
             <a:extLst xmlns:a="http://schemas.openxmlformats.org/drawingml/2006/main">
               <a:ext uri="{FF2B5EF4-FFF2-40B4-BE49-F238E27FC236}">
-                <a16:creationId xmlns:a16="http://schemas.microsoft.com/office/drawing/2014/main" id="{4E7FB0EF-2939-4A4B-9579-A49EB76E5790}"/>
+                <a16:creationId xmlns:a16="http://schemas.microsoft.com/office/drawing/2014/main" id="{B7C83F66-32B9-419D-B4B6-C906E22B334B}"/>
               </a:ext>
             </a:extLst>
           </p:cNvPr>
@@ -5762,7 +5762,7 @@
           <p:cNvPr id="5" name="">
             <a:extLst xmlns:a="http://schemas.openxmlformats.org/drawingml/2006/main">
               <a:ext uri="{FF2B5EF4-FFF2-40B4-BE49-F238E27FC236}">
-                <a16:creationId xmlns:a16="http://schemas.microsoft.com/office/drawing/2014/main" id="{21FEBF79-2046-4CEB-AA25-98C03FEF647E}"/>
+                <a16:creationId xmlns:a16="http://schemas.microsoft.com/office/drawing/2014/main" id="{4FA2F0F0-8ECA-468C-AFCB-667F91DE6608}"/>
               </a:ext>
             </a:extLst>
           </p:cNvPr>
@@ -5819,7 +5819,7 @@
           <p:cNvPr id="6" name="">
             <a:extLst xmlns:a="http://schemas.openxmlformats.org/drawingml/2006/main">
               <a:ext uri="{FF2B5EF4-FFF2-40B4-BE49-F238E27FC236}">
-                <a16:creationId xmlns:a16="http://schemas.microsoft.com/office/drawing/2014/main" id="{4F1ED2F0-6F8A-4CDC-B44A-99E96E1D0A5F}"/>
+                <a16:creationId xmlns:a16="http://schemas.microsoft.com/office/drawing/2014/main" id="{E7D3C905-E2CF-45FD-911A-B21DC7C8F3FA}"/>
               </a:ext>
             </a:extLst>
           </p:cNvPr>
@@ -5876,7 +5876,7 @@
           <p:cNvPr id="7" name="">
             <a:extLst xmlns:a="http://schemas.openxmlformats.org/drawingml/2006/main">
               <a:ext uri="{FF2B5EF4-FFF2-40B4-BE49-F238E27FC236}">
-                <a16:creationId xmlns:a16="http://schemas.microsoft.com/office/drawing/2014/main" id="{C80A1FC9-4F99-43BE-B11F-40E50092E325}"/>
+                <a16:creationId xmlns:a16="http://schemas.microsoft.com/office/drawing/2014/main" id="{8309ECDE-68B3-4C46-A811-163F2BB09D4E}"/>
               </a:ext>
             </a:extLst>
           </p:cNvPr>
@@ -5908,7 +5908,7 @@
           <p:cNvPr id="8" name="">
             <a:extLst xmlns:a="http://schemas.openxmlformats.org/drawingml/2006/main">
               <a:ext uri="{FF2B5EF4-FFF2-40B4-BE49-F238E27FC236}">
-                <a16:creationId xmlns:a16="http://schemas.microsoft.com/office/drawing/2014/main" id="{DB457E85-F03E-4070-AF87-92498BB19C12}"/>
+                <a16:creationId xmlns:a16="http://schemas.microsoft.com/office/drawing/2014/main" id="{7566EF8A-C9B4-4F7F-AF0A-172345E79945}"/>
               </a:ext>
             </a:extLst>
           </p:cNvPr>
@@ -5965,7 +5965,7 @@
           <p:cNvPr id="9" name="">
             <a:extLst xmlns:a="http://schemas.openxmlformats.org/drawingml/2006/main">
               <a:ext uri="{FF2B5EF4-FFF2-40B4-BE49-F238E27FC236}">
-                <a16:creationId xmlns:a16="http://schemas.microsoft.com/office/drawing/2014/main" id="{EB9F9E72-7FC2-412E-BCBE-7BA0B7B84729}"/>
+                <a16:creationId xmlns:a16="http://schemas.microsoft.com/office/drawing/2014/main" id="{61943A57-CD5E-4E58-99F0-0CA3C0DBC1C2}"/>
               </a:ext>
             </a:extLst>
           </p:cNvPr>
@@ -6022,7 +6022,7 @@
           <p:cNvPr id="10" name="">
             <a:extLst xmlns:a="http://schemas.openxmlformats.org/drawingml/2006/main">
               <a:ext uri="{FF2B5EF4-FFF2-40B4-BE49-F238E27FC236}">
-                <a16:creationId xmlns:a16="http://schemas.microsoft.com/office/drawing/2014/main" id="{FDA77D88-89B6-4C38-979F-A017F12E88F5}"/>
+                <a16:creationId xmlns:a16="http://schemas.microsoft.com/office/drawing/2014/main" id="{31705C23-64BE-4617-B4CE-6AC68DA669E1}"/>
               </a:ext>
             </a:extLst>
           </p:cNvPr>
@@ -6056,7 +6056,7 @@
           <p:cNvPr id="11" name="">
             <a:extLst xmlns:a="http://schemas.openxmlformats.org/drawingml/2006/main">
               <a:ext uri="{FF2B5EF4-FFF2-40B4-BE49-F238E27FC236}">
-                <a16:creationId xmlns:a16="http://schemas.microsoft.com/office/drawing/2014/main" id="{5443E408-5CDF-4150-A647-AC0704B0D0CC}"/>
+                <a16:creationId xmlns:a16="http://schemas.microsoft.com/office/drawing/2014/main" id="{063D54B7-E85E-410C-B362-6395F14E0A22}"/>
               </a:ext>
             </a:extLst>
           </p:cNvPr>
@@ -6088,7 +6088,7 @@
           <p:cNvPr id="12" name="">
             <a:extLst xmlns:a="http://schemas.openxmlformats.org/drawingml/2006/main">
               <a:ext uri="{FF2B5EF4-FFF2-40B4-BE49-F238E27FC236}">
-                <a16:creationId xmlns:a16="http://schemas.microsoft.com/office/drawing/2014/main" id="{6CC4C5B7-CE59-459E-B462-AC0F4EB0A352}"/>
+                <a16:creationId xmlns:a16="http://schemas.microsoft.com/office/drawing/2014/main" id="{A74A6B83-877B-40BA-996A-AAFB652A2ABA}"/>
               </a:ext>
             </a:extLst>
           </p:cNvPr>
@@ -6145,7 +6145,7 @@
           <p:cNvPr id="13" name="">
             <a:extLst xmlns:a="http://schemas.openxmlformats.org/drawingml/2006/main">
               <a:ext uri="{FF2B5EF4-FFF2-40B4-BE49-F238E27FC236}">
-                <a16:creationId xmlns:a16="http://schemas.microsoft.com/office/drawing/2014/main" id="{804C1025-5599-46D7-BBD7-771B8E46995B}"/>
+                <a16:creationId xmlns:a16="http://schemas.microsoft.com/office/drawing/2014/main" id="{D8B64621-B4F8-426B-856C-C239C8404C86}"/>
               </a:ext>
             </a:extLst>
           </p:cNvPr>
@@ -6202,7 +6202,7 @@
           <p:cNvPr id="14" name="">
             <a:extLst xmlns:a="http://schemas.openxmlformats.org/drawingml/2006/main">
               <a:ext uri="{FF2B5EF4-FFF2-40B4-BE49-F238E27FC236}">
-                <a16:creationId xmlns:a16="http://schemas.microsoft.com/office/drawing/2014/main" id="{922AC121-C3E7-4778-8800-C7A2C3B16ED0}"/>
+                <a16:creationId xmlns:a16="http://schemas.microsoft.com/office/drawing/2014/main" id="{E1A0F720-1084-42ED-A803-DA5842743A39}"/>
               </a:ext>
             </a:extLst>
           </p:cNvPr>
@@ -6236,7 +6236,7 @@
           <p:cNvPr id="15" name="">
             <a:extLst xmlns:a="http://schemas.openxmlformats.org/drawingml/2006/main">
               <a:ext uri="{FF2B5EF4-FFF2-40B4-BE49-F238E27FC236}">
-                <a16:creationId xmlns:a16="http://schemas.microsoft.com/office/drawing/2014/main" id="{C900F3EE-854C-4AA3-B4CF-1FA9FB801884}"/>
+                <a16:creationId xmlns:a16="http://schemas.microsoft.com/office/drawing/2014/main" id="{3258C7A8-3D43-4A24-A1BF-D034C92E14A3}"/>
               </a:ext>
             </a:extLst>
           </p:cNvPr>
@@ -6268,7 +6268,7 @@
           <p:cNvPr id="16" name="">
             <a:extLst xmlns:a="http://schemas.openxmlformats.org/drawingml/2006/main">
               <a:ext uri="{FF2B5EF4-FFF2-40B4-BE49-F238E27FC236}">
-                <a16:creationId xmlns:a16="http://schemas.microsoft.com/office/drawing/2014/main" id="{63608584-EE52-467E-935F-45D45FE779C9}"/>
+                <a16:creationId xmlns:a16="http://schemas.microsoft.com/office/drawing/2014/main" id="{64B0EF36-D183-45A1-8AAD-1C88A0ED50E2}"/>
               </a:ext>
             </a:extLst>
           </p:cNvPr>
@@ -6325,7 +6325,7 @@
           <p:cNvPr id="17" name="">
             <a:extLst xmlns:a="http://schemas.openxmlformats.org/drawingml/2006/main">
               <a:ext uri="{FF2B5EF4-FFF2-40B4-BE49-F238E27FC236}">
-                <a16:creationId xmlns:a16="http://schemas.microsoft.com/office/drawing/2014/main" id="{74FA7B48-D659-4307-9760-BEA5A6CFFA31}"/>
+                <a16:creationId xmlns:a16="http://schemas.microsoft.com/office/drawing/2014/main" id="{662336E6-E620-477A-AB61-72151CB69742}"/>
               </a:ext>
             </a:extLst>
           </p:cNvPr>
@@ -6382,7 +6382,7 @@
           <p:cNvPr id="18" name="">
             <a:extLst xmlns:a="http://schemas.openxmlformats.org/drawingml/2006/main">
               <a:ext uri="{FF2B5EF4-FFF2-40B4-BE49-F238E27FC236}">
-                <a16:creationId xmlns:a16="http://schemas.microsoft.com/office/drawing/2014/main" id="{D5BE6788-390B-4B95-895F-C12AC120926F}"/>
+                <a16:creationId xmlns:a16="http://schemas.microsoft.com/office/drawing/2014/main" id="{1D0F0229-AD46-4850-B2F8-786F55CF024D}"/>
               </a:ext>
             </a:extLst>
           </p:cNvPr>
@@ -6416,7 +6416,7 @@
           <p:cNvPr id="19" name="">
             <a:extLst xmlns:a="http://schemas.openxmlformats.org/drawingml/2006/main">
               <a:ext uri="{FF2B5EF4-FFF2-40B4-BE49-F238E27FC236}">
-                <a16:creationId xmlns:a16="http://schemas.microsoft.com/office/drawing/2014/main" id="{93A87DE4-495B-447C-B0B0-FEDCB93CA3FD}"/>
+                <a16:creationId xmlns:a16="http://schemas.microsoft.com/office/drawing/2014/main" id="{4D61C179-6A26-4721-9C86-1AE14F94C1CA}"/>
               </a:ext>
             </a:extLst>
           </p:cNvPr>
@@ -6448,7 +6448,7 @@
           <p:cNvPr id="20" name="">
             <a:extLst xmlns:a="http://schemas.openxmlformats.org/drawingml/2006/main">
               <a:ext uri="{FF2B5EF4-FFF2-40B4-BE49-F238E27FC236}">
-                <a16:creationId xmlns:a16="http://schemas.microsoft.com/office/drawing/2014/main" id="{E4E663F9-12D6-4F38-8F49-E54A3744DE20}"/>
+                <a16:creationId xmlns:a16="http://schemas.microsoft.com/office/drawing/2014/main" id="{D98700EC-1B52-414C-9C6D-EDD2C1011C89}"/>
               </a:ext>
             </a:extLst>
           </p:cNvPr>
@@ -6505,7 +6505,7 @@
           <p:cNvPr id="21" name="">
             <a:extLst xmlns:a="http://schemas.openxmlformats.org/drawingml/2006/main">
               <a:ext uri="{FF2B5EF4-FFF2-40B4-BE49-F238E27FC236}">
-                <a16:creationId xmlns:a16="http://schemas.microsoft.com/office/drawing/2014/main" id="{8CCB7DC6-9396-4B57-9FD3-8DE8215E5317}"/>
+                <a16:creationId xmlns:a16="http://schemas.microsoft.com/office/drawing/2014/main" id="{490358D0-677C-4C60-BEB4-2C3A49FB99AA}"/>
               </a:ext>
             </a:extLst>
           </p:cNvPr>
@@ -6562,7 +6562,7 @@
           <p:cNvPr id="22" name="">
             <a:extLst xmlns:a="http://schemas.openxmlformats.org/drawingml/2006/main">
               <a:ext uri="{FF2B5EF4-FFF2-40B4-BE49-F238E27FC236}">
-                <a16:creationId xmlns:a16="http://schemas.microsoft.com/office/drawing/2014/main" id="{BC66758B-3208-487D-81D2-0C689E67F27A}"/>
+                <a16:creationId xmlns:a16="http://schemas.microsoft.com/office/drawing/2014/main" id="{648FA868-9959-4881-973E-70E0A8CE235E}"/>
               </a:ext>
             </a:extLst>
           </p:cNvPr>
@@ -6617,7 +6617,7 @@
     </p:spTree>
     <p:extLst>
       <p:ext uri="{BB962C8B-B14F-4D97-AF65-F5344CB8AC3E}">
-        <p14:creationId xmlns:p14="http://schemas.microsoft.com/office/powerpoint/2010/main" val="1600060787"/>
+        <p14:creationId xmlns:p14="http://schemas.microsoft.com/office/powerpoint/2010/main" val="1854263128"/>
       </p:ext>
     </p:extLst>
   </p:cSld>
@@ -6818,7 +6818,7 @@
           <p:cNvPr id="16" name="">
             <a:extLst xmlns:a="http://schemas.openxmlformats.org/drawingml/2006/main">
               <a:ext uri="{FF2B5EF4-FFF2-40B4-BE49-F238E27FC236}">
-                <a16:creationId xmlns:a16="http://schemas.microsoft.com/office/drawing/2014/main" id="{17146F20-F578-4C3E-BDDD-063A84D36FF8}"/>
+                <a16:creationId xmlns:a16="http://schemas.microsoft.com/office/drawing/2014/main" id="{F90827A1-6358-4E95-8A62-48A29776BE9F}"/>
               </a:ext>
             </a:extLst>
           </p:cNvPr>
@@ -6850,7 +6850,7 @@
           <p:cNvPr id="2" name="">
             <a:extLst xmlns:a="http://schemas.openxmlformats.org/drawingml/2006/main">
               <a:ext uri="{FF2B5EF4-FFF2-40B4-BE49-F238E27FC236}">
-                <a16:creationId xmlns:a16="http://schemas.microsoft.com/office/drawing/2014/main" id="{F28F5460-220F-49BC-9DEA-F8350653D730}"/>
+                <a16:creationId xmlns:a16="http://schemas.microsoft.com/office/drawing/2014/main" id="{017B3055-76CE-4BC6-9BF2-3817C3AF7D0B}"/>
               </a:ext>
             </a:extLst>
           </p:cNvPr>
@@ -6907,7 +6907,7 @@
           <p:cNvPr id="3" name="">
             <a:extLst xmlns:a="http://schemas.openxmlformats.org/drawingml/2006/main">
               <a:ext uri="{FF2B5EF4-FFF2-40B4-BE49-F238E27FC236}">
-                <a16:creationId xmlns:a16="http://schemas.microsoft.com/office/drawing/2014/main" id="{A79819AC-0501-445B-89EE-6532E7972586}"/>
+                <a16:creationId xmlns:a16="http://schemas.microsoft.com/office/drawing/2014/main" id="{6CFB7436-0EA8-4346-B33D-D8EE6E502C24}"/>
               </a:ext>
             </a:extLst>
           </p:cNvPr>
@@ -6939,7 +6939,7 @@
           <p:cNvPr id="4" name="">
             <a:extLst xmlns:a="http://schemas.openxmlformats.org/drawingml/2006/main">
               <a:ext uri="{FF2B5EF4-FFF2-40B4-BE49-F238E27FC236}">
-                <a16:creationId xmlns:a16="http://schemas.microsoft.com/office/drawing/2014/main" id="{FBE592BB-E26A-4544-8017-6C90A767CE14}"/>
+                <a16:creationId xmlns:a16="http://schemas.microsoft.com/office/drawing/2014/main" id="{C7612D41-0B2F-437C-B3B8-6CDDE579BDEB}"/>
               </a:ext>
             </a:extLst>
           </p:cNvPr>
@@ -6996,7 +6996,7 @@
           <p:cNvPr id="5" name="">
             <a:extLst xmlns:a="http://schemas.openxmlformats.org/drawingml/2006/main">
               <a:ext uri="{FF2B5EF4-FFF2-40B4-BE49-F238E27FC236}">
-                <a16:creationId xmlns:a16="http://schemas.microsoft.com/office/drawing/2014/main" id="{7D847D36-AA3B-4F53-AA24-549CD113D726}"/>
+                <a16:creationId xmlns:a16="http://schemas.microsoft.com/office/drawing/2014/main" id="{A527A7BA-F4F1-41CD-93E9-E272320A21BC}"/>
               </a:ext>
             </a:extLst>
           </p:cNvPr>
@@ -7053,7 +7053,7 @@
           <p:cNvPr id="6" name="">
             <a:extLst xmlns:a="http://schemas.openxmlformats.org/drawingml/2006/main">
               <a:ext uri="{FF2B5EF4-FFF2-40B4-BE49-F238E27FC236}">
-                <a16:creationId xmlns:a16="http://schemas.microsoft.com/office/drawing/2014/main" id="{09640EEB-333E-4F7F-9048-4E53D8655C33}"/>
+                <a16:creationId xmlns:a16="http://schemas.microsoft.com/office/drawing/2014/main" id="{FE1EC2EB-8774-4C8A-883D-420F14C961A5}"/>
               </a:ext>
             </a:extLst>
           </p:cNvPr>
@@ -7110,7 +7110,7 @@
           <p:cNvPr id="7" name="">
             <a:extLst xmlns:a="http://schemas.openxmlformats.org/drawingml/2006/main">
               <a:ext uri="{FF2B5EF4-FFF2-40B4-BE49-F238E27FC236}">
-                <a16:creationId xmlns:a16="http://schemas.microsoft.com/office/drawing/2014/main" id="{1EDFB05E-9290-4B14-96CE-8B3DDF3BF039}"/>
+                <a16:creationId xmlns:a16="http://schemas.microsoft.com/office/drawing/2014/main" id="{D49154F6-BAD9-461B-9AF6-20C4636C0001}"/>
               </a:ext>
             </a:extLst>
           </p:cNvPr>
@@ -7142,7 +7142,7 @@
           <p:cNvPr id="8" name="">
             <a:extLst xmlns:a="http://schemas.openxmlformats.org/drawingml/2006/main">
               <a:ext uri="{FF2B5EF4-FFF2-40B4-BE49-F238E27FC236}">
-                <a16:creationId xmlns:a16="http://schemas.microsoft.com/office/drawing/2014/main" id="{5FFBA81E-9917-4C5A-A494-98C91090C6DF}"/>
+                <a16:creationId xmlns:a16="http://schemas.microsoft.com/office/drawing/2014/main" id="{49466AF5-AE99-428A-A8CA-59A5D4C1E302}"/>
               </a:ext>
             </a:extLst>
           </p:cNvPr>
@@ -7199,7 +7199,7 @@
           <p:cNvPr id="9" name="">
             <a:extLst xmlns:a="http://schemas.openxmlformats.org/drawingml/2006/main">
               <a:ext uri="{FF2B5EF4-FFF2-40B4-BE49-F238E27FC236}">
-                <a16:creationId xmlns:a16="http://schemas.microsoft.com/office/drawing/2014/main" id="{A0A9F80B-7434-4D54-8D56-336FFB4A9F32}"/>
+                <a16:creationId xmlns:a16="http://schemas.microsoft.com/office/drawing/2014/main" id="{036B835A-788D-4A16-8F70-AE6880E4F11D}"/>
               </a:ext>
             </a:extLst>
           </p:cNvPr>
@@ -7256,7 +7256,7 @@
           <p:cNvPr id="10" name="">
             <a:extLst xmlns:a="http://schemas.openxmlformats.org/drawingml/2006/main">
               <a:ext uri="{FF2B5EF4-FFF2-40B4-BE49-F238E27FC236}">
-                <a16:creationId xmlns:a16="http://schemas.microsoft.com/office/drawing/2014/main" id="{168A0F4D-28C8-4E7B-9E02-9B7A016EBB6C}"/>
+                <a16:creationId xmlns:a16="http://schemas.microsoft.com/office/drawing/2014/main" id="{80C798EE-C16C-4BF3-9D55-AC22B086A751}"/>
               </a:ext>
             </a:extLst>
           </p:cNvPr>
@@ -7313,7 +7313,7 @@
           <p:cNvPr id="11" name="">
             <a:extLst xmlns:a="http://schemas.openxmlformats.org/drawingml/2006/main">
               <a:ext uri="{FF2B5EF4-FFF2-40B4-BE49-F238E27FC236}">
-                <a16:creationId xmlns:a16="http://schemas.microsoft.com/office/drawing/2014/main" id="{5269A1BF-7D08-42B8-A7B1-531A37E1F84C}"/>
+                <a16:creationId xmlns:a16="http://schemas.microsoft.com/office/drawing/2014/main" id="{7DC52CAC-3D3D-4D20-88CE-60FC18BE9779}"/>
               </a:ext>
             </a:extLst>
           </p:cNvPr>
@@ -7345,7 +7345,7 @@
           <p:cNvPr id="12" name="">
             <a:extLst xmlns:a="http://schemas.openxmlformats.org/drawingml/2006/main">
               <a:ext uri="{FF2B5EF4-FFF2-40B4-BE49-F238E27FC236}">
-                <a16:creationId xmlns:a16="http://schemas.microsoft.com/office/drawing/2014/main" id="{E1237307-6CB1-468C-9AD8-2E3EFAB58329}"/>
+                <a16:creationId xmlns:a16="http://schemas.microsoft.com/office/drawing/2014/main" id="{13A2FDCB-A357-4434-B122-F8EB1044116E}"/>
               </a:ext>
             </a:extLst>
           </p:cNvPr>
@@ -7402,7 +7402,7 @@
           <p:cNvPr id="13" name="">
             <a:extLst xmlns:a="http://schemas.openxmlformats.org/drawingml/2006/main">
               <a:ext uri="{FF2B5EF4-FFF2-40B4-BE49-F238E27FC236}">
-                <a16:creationId xmlns:a16="http://schemas.microsoft.com/office/drawing/2014/main" id="{8749674B-50FD-47A2-BFEB-8B0D6BD5EC8F}"/>
+                <a16:creationId xmlns:a16="http://schemas.microsoft.com/office/drawing/2014/main" id="{B1A44016-8B1F-46AB-8C9D-4F73303EF419}"/>
               </a:ext>
             </a:extLst>
           </p:cNvPr>
@@ -7459,7 +7459,7 @@
           <p:cNvPr id="14" name="">
             <a:extLst xmlns:a="http://schemas.openxmlformats.org/drawingml/2006/main">
               <a:ext uri="{FF2B5EF4-FFF2-40B4-BE49-F238E27FC236}">
-                <a16:creationId xmlns:a16="http://schemas.microsoft.com/office/drawing/2014/main" id="{44A3336F-F8DD-4FD0-84D4-1A48CC87FFB6}"/>
+                <a16:creationId xmlns:a16="http://schemas.microsoft.com/office/drawing/2014/main" id="{14C879FE-9FF6-4275-884A-00F6B6375A95}"/>
               </a:ext>
             </a:extLst>
           </p:cNvPr>
@@ -7516,7 +7516,7 @@
           <p:cNvPr id="15" name="">
             <a:extLst xmlns:a="http://schemas.openxmlformats.org/drawingml/2006/main">
               <a:ext uri="{FF2B5EF4-FFF2-40B4-BE49-F238E27FC236}">
-                <a16:creationId xmlns:a16="http://schemas.microsoft.com/office/drawing/2014/main" id="{1731436B-1AA8-43BD-AD33-4EF778A515CC}"/>
+                <a16:creationId xmlns:a16="http://schemas.microsoft.com/office/drawing/2014/main" id="{0BFCD750-BF84-4C74-A643-B9E92074D43F}"/>
               </a:ext>
             </a:extLst>
           </p:cNvPr>
@@ -7571,7 +7571,7 @@
     </p:spTree>
     <p:extLst>
       <p:ext uri="{BB962C8B-B14F-4D97-AF65-F5344CB8AC3E}">
-        <p14:creationId xmlns:p14="http://schemas.microsoft.com/office/powerpoint/2010/main" val="1876478697"/>
+        <p14:creationId xmlns:p14="http://schemas.microsoft.com/office/powerpoint/2010/main" val="1227539205"/>
       </p:ext>
     </p:extLst>
   </p:cSld>
@@ -7769,10 +7769,10 @@
       </p:grpSpPr>
       <p:sp>
         <p:nvSpPr>
-          <p:cNvPr id="23" name="">
-            <a:extLst xmlns:a="http://schemas.openxmlformats.org/drawingml/2006/main">
-              <a:ext uri="{FF2B5EF4-FFF2-40B4-BE49-F238E27FC236}">
-                <a16:creationId xmlns:a16="http://schemas.microsoft.com/office/drawing/2014/main" id="{00C214DF-20E3-4C89-9724-2E70A0B851E8}"/>
+          <p:cNvPr id="26" name="">
+            <a:extLst xmlns:a="http://schemas.openxmlformats.org/drawingml/2006/main">
+              <a:ext uri="{FF2B5EF4-FFF2-40B4-BE49-F238E27FC236}">
+                <a16:creationId xmlns:a16="http://schemas.microsoft.com/office/drawing/2014/main" id="{A041BBEC-87DC-44DB-A474-0D203AED4718}"/>
               </a:ext>
             </a:extLst>
           </p:cNvPr>
@@ -7804,7 +7804,7 @@
           <p:cNvPr id="2" name="">
             <a:extLst xmlns:a="http://schemas.openxmlformats.org/drawingml/2006/main">
               <a:ext uri="{FF2B5EF4-FFF2-40B4-BE49-F238E27FC236}">
-                <a16:creationId xmlns:a16="http://schemas.microsoft.com/office/drawing/2014/main" id="{EE64673B-BA00-4D40-AECA-A91D12C91E0B}"/>
+                <a16:creationId xmlns:a16="http://schemas.microsoft.com/office/drawing/2014/main" id="{9C0324B8-0F7C-48FA-8652-52B14B8DBF5C}"/>
               </a:ext>
             </a:extLst>
           </p:cNvPr>
@@ -7861,7 +7861,7 @@
           <p:cNvPr id="3" name="">
             <a:extLst xmlns:a="http://schemas.openxmlformats.org/drawingml/2006/main">
               <a:ext uri="{FF2B5EF4-FFF2-40B4-BE49-F238E27FC236}">
-                <a16:creationId xmlns:a16="http://schemas.microsoft.com/office/drawing/2014/main" id="{17F1C184-32C5-4B0D-9627-B78506639D37}"/>
+                <a16:creationId xmlns:a16="http://schemas.microsoft.com/office/drawing/2014/main" id="{CF69D618-6ACB-42D5-BE23-F089406D9D54}"/>
               </a:ext>
             </a:extLst>
           </p:cNvPr>
@@ -7893,7 +7893,7 @@
           <p:cNvPr id="4" name="">
             <a:extLst xmlns:a="http://schemas.openxmlformats.org/drawingml/2006/main">
               <a:ext uri="{FF2B5EF4-FFF2-40B4-BE49-F238E27FC236}">
-                <a16:creationId xmlns:a16="http://schemas.microsoft.com/office/drawing/2014/main" id="{1BFD40B6-07DF-4951-99DD-6746F55C9AD2}"/>
+                <a16:creationId xmlns:a16="http://schemas.microsoft.com/office/drawing/2014/main" id="{6E2D6B5F-5244-4208-98F3-66169CD10595}"/>
               </a:ext>
             </a:extLst>
           </p:cNvPr>
@@ -7950,7 +7950,7 @@
           <p:cNvPr id="5" name="">
             <a:extLst xmlns:a="http://schemas.openxmlformats.org/drawingml/2006/main">
               <a:ext uri="{FF2B5EF4-FFF2-40B4-BE49-F238E27FC236}">
-                <a16:creationId xmlns:a16="http://schemas.microsoft.com/office/drawing/2014/main" id="{9E94B627-8E15-469C-B17D-0BC2481A85C5}"/>
+                <a16:creationId xmlns:a16="http://schemas.microsoft.com/office/drawing/2014/main" id="{6F253243-06EF-4FC3-A0AD-897CB09F9C75}"/>
               </a:ext>
             </a:extLst>
           </p:cNvPr>
@@ -8007,7 +8007,7 @@
           <p:cNvPr id="6" name="">
             <a:extLst xmlns:a="http://schemas.openxmlformats.org/drawingml/2006/main">
               <a:ext uri="{FF2B5EF4-FFF2-40B4-BE49-F238E27FC236}">
-                <a16:creationId xmlns:a16="http://schemas.microsoft.com/office/drawing/2014/main" id="{EA5C99AE-4B45-417B-8B28-1B443CFDF54A}"/>
+                <a16:creationId xmlns:a16="http://schemas.microsoft.com/office/drawing/2014/main" id="{CA34A9BE-E42A-4E22-953A-E786FCC52A04}"/>
               </a:ext>
             </a:extLst>
           </p:cNvPr>
@@ -8064,7 +8064,7 @@
           <p:cNvPr id="7" name="">
             <a:extLst xmlns:a="http://schemas.openxmlformats.org/drawingml/2006/main">
               <a:ext uri="{FF2B5EF4-FFF2-40B4-BE49-F238E27FC236}">
-                <a16:creationId xmlns:a16="http://schemas.microsoft.com/office/drawing/2014/main" id="{AC4C2BD1-C3BC-497C-82E1-CB74A28EC94E}"/>
+                <a16:creationId xmlns:a16="http://schemas.microsoft.com/office/drawing/2014/main" id="{6B894060-414E-4429-9744-7534F3D7F498}"/>
               </a:ext>
             </a:extLst>
           </p:cNvPr>
@@ -8096,7 +8096,7 @@
           <p:cNvPr id="8" name="">
             <a:extLst xmlns:a="http://schemas.openxmlformats.org/drawingml/2006/main">
               <a:ext uri="{FF2B5EF4-FFF2-40B4-BE49-F238E27FC236}">
-                <a16:creationId xmlns:a16="http://schemas.microsoft.com/office/drawing/2014/main" id="{6198DE3E-A426-4AD8-A76D-94C49268991D}"/>
+                <a16:creationId xmlns:a16="http://schemas.microsoft.com/office/drawing/2014/main" id="{0EE8B1CB-61B4-492A-9FC4-821167E65CC8}"/>
               </a:ext>
             </a:extLst>
           </p:cNvPr>
@@ -8153,7 +8153,7 @@
           <p:cNvPr id="9" name="">
             <a:extLst xmlns:a="http://schemas.openxmlformats.org/drawingml/2006/main">
               <a:ext uri="{FF2B5EF4-FFF2-40B4-BE49-F238E27FC236}">
-                <a16:creationId xmlns:a16="http://schemas.microsoft.com/office/drawing/2014/main" id="{12E98BB8-4B58-4B0D-B457-A49AFBD5FB79}"/>
+                <a16:creationId xmlns:a16="http://schemas.microsoft.com/office/drawing/2014/main" id="{D4F6646B-DF17-480E-9DE8-D6A168DF58E8}"/>
               </a:ext>
             </a:extLst>
           </p:cNvPr>
@@ -8210,19 +8210,19 @@
           <p:cNvPr id="10" name="">
             <a:extLst xmlns:a="http://schemas.openxmlformats.org/drawingml/2006/main">
               <a:ext uri="{FF2B5EF4-FFF2-40B4-BE49-F238E27FC236}">
-                <a16:creationId xmlns:a16="http://schemas.microsoft.com/office/drawing/2014/main" id="{6AF86A16-BF43-42D4-8E76-21811A350341}"/>
-              </a:ext>
-            </a:extLst>
-          </p:cNvPr>
-          <p:cNvSpPr>
-            <a:spLocks xmlns:a="http://schemas.openxmlformats.org/drawingml/2006/main" noGrp="1"/>
-          </p:cNvSpPr>
-          <p:nvPr/>
-        </p:nvSpPr>
-        <p:spPr>
-          <a:xfrm xmlns:a="http://schemas.openxmlformats.org/drawingml/2006/main">
-            <a:off x="914400" y="1257300"/>
-            <a:ext cx="10363200" cy="781050"/>
+                <a16:creationId xmlns:a16="http://schemas.microsoft.com/office/drawing/2014/main" id="{687FE9EE-5948-45DD-AE06-A9B1ED06E59D}"/>
+              </a:ext>
+            </a:extLst>
+          </p:cNvPr>
+          <p:cNvSpPr>
+            <a:spLocks xmlns:a="http://schemas.openxmlformats.org/drawingml/2006/main" noGrp="1"/>
+          </p:cNvSpPr>
+          <p:nvPr/>
+        </p:nvSpPr>
+        <p:spPr>
+          <a:xfrm xmlns:a="http://schemas.openxmlformats.org/drawingml/2006/main">
+            <a:off x="857250" y="1219200"/>
+            <a:ext cx="10477500" cy="742950"/>
           </a:xfrm>
           <a:prstGeom xmlns:a="http://schemas.openxmlformats.org/drawingml/2006/main" prst="rect">
             <a:avLst/>
@@ -8239,7 +8239,7 @@
           <a:lstStyle xmlns:a="http://schemas.openxmlformats.org/drawingml/2006/main"/>
           <a:p xmlns:a="http://schemas.openxmlformats.org/drawingml/2006/main">
             <a:pPr algn="ctr">
-              <a:defRPr sz="2175" b="1">
+              <a:defRPr sz="2100" b="1">
                 <a:solidFill>
                   <a:srgbClr val="17253A"/>
                 </a:solidFill>
@@ -8249,7 +8249,7 @@
               </a:defRPr>
             </a:pPr>
             <a:r>
-              <a:rPr sz="2175" b="1">
+              <a:rPr sz="2100" b="1">
                 <a:solidFill>
                   <a:srgbClr val="17253A"/>
                 </a:solidFill>
@@ -8267,28 +8267,30 @@
           <p:cNvPr id="11" name="">
             <a:extLst xmlns:a="http://schemas.openxmlformats.org/drawingml/2006/main">
               <a:ext uri="{FF2B5EF4-FFF2-40B4-BE49-F238E27FC236}">
-                <a16:creationId xmlns:a16="http://schemas.microsoft.com/office/drawing/2014/main" id="{E0B1B56A-E7CF-487A-B8AB-78701AF2A0F8}"/>
-              </a:ext>
-            </a:extLst>
-          </p:cNvPr>
-          <p:cNvSpPr>
-            <a:spLocks xmlns:a="http://schemas.openxmlformats.org/drawingml/2006/main" noGrp="1"/>
-          </p:cNvSpPr>
-          <p:nvPr/>
-        </p:nvSpPr>
-        <p:spPr>
-          <a:xfrm xmlns:a="http://schemas.openxmlformats.org/drawingml/2006/main">
-            <a:off x="1000125" y="2247900"/>
-            <a:ext cx="476250" cy="476250"/>
-          </a:xfrm>
-          <a:prstGeom xmlns:a="http://schemas.openxmlformats.org/drawingml/2006/main" prst="ellipse">
+                <a16:creationId xmlns:a16="http://schemas.microsoft.com/office/drawing/2014/main" id="{628302CE-5881-4270-BE4A-7C67A4F2490C}"/>
+              </a:ext>
+            </a:extLst>
+          </p:cNvPr>
+          <p:cNvSpPr>
+            <a:spLocks xmlns:a="http://schemas.openxmlformats.org/drawingml/2006/main" noGrp="1"/>
+          </p:cNvSpPr>
+          <p:nvPr/>
+        </p:nvSpPr>
+        <p:spPr>
+          <a:xfrm xmlns:a="http://schemas.openxmlformats.org/drawingml/2006/main">
+            <a:off x="971550" y="2124075"/>
+            <a:ext cx="38100" cy="3524250"/>
+          </a:xfrm>
+          <a:prstGeom xmlns:a="http://schemas.openxmlformats.org/drawingml/2006/main" prst="rect">
             <a:avLst/>
           </a:prstGeom>
           <a:solidFill xmlns:a="http://schemas.openxmlformats.org/drawingml/2006/main">
-            <a:srgbClr val="18324A"/>
+            <a:srgbClr val="2C6E73"/>
           </a:solidFill>
           <a:ln xmlns:a="http://schemas.openxmlformats.org/drawingml/2006/main" w="0">
-            <a:noFill/>
+            <a:solidFill>
+              <a:srgbClr val="2C6E73"/>
+            </a:solidFill>
           </a:ln>
         </p:spPr>
       </p:sp>
@@ -8297,19 +8299,19 @@
           <p:cNvPr id="12" name="">
             <a:extLst xmlns:a="http://schemas.openxmlformats.org/drawingml/2006/main">
               <a:ext uri="{FF2B5EF4-FFF2-40B4-BE49-F238E27FC236}">
-                <a16:creationId xmlns:a16="http://schemas.microsoft.com/office/drawing/2014/main" id="{44B4D390-D255-4202-AF15-47AEBECC0F93}"/>
-              </a:ext>
-            </a:extLst>
-          </p:cNvPr>
-          <p:cNvSpPr>
-            <a:spLocks xmlns:a="http://schemas.openxmlformats.org/drawingml/2006/main" noGrp="1"/>
-          </p:cNvSpPr>
-          <p:nvPr/>
-        </p:nvSpPr>
-        <p:spPr>
-          <a:xfrm xmlns:a="http://schemas.openxmlformats.org/drawingml/2006/main">
-            <a:off x="1000125" y="2276475"/>
-            <a:ext cx="476250" cy="419100"/>
+                <a16:creationId xmlns:a16="http://schemas.microsoft.com/office/drawing/2014/main" id="{DAA74B97-AB32-4884-B6A3-B5FB05A53694}"/>
+              </a:ext>
+            </a:extLst>
+          </p:cNvPr>
+          <p:cNvSpPr>
+            <a:spLocks xmlns:a="http://schemas.openxmlformats.org/drawingml/2006/main" noGrp="1"/>
+          </p:cNvSpPr>
+          <p:nvPr/>
+        </p:nvSpPr>
+        <p:spPr>
+          <a:xfrm xmlns:a="http://schemas.openxmlformats.org/drawingml/2006/main">
+            <a:off x="1162050" y="2200275"/>
+            <a:ext cx="400050" cy="400050"/>
           </a:xfrm>
           <a:prstGeom xmlns:a="http://schemas.openxmlformats.org/drawingml/2006/main" prst="rect">
             <a:avLst/>
@@ -8326,9 +8328,9 @@
           <a:lstStyle xmlns:a="http://schemas.openxmlformats.org/drawingml/2006/main"/>
           <a:p xmlns:a="http://schemas.openxmlformats.org/drawingml/2006/main">
             <a:pPr algn="ctr">
-              <a:defRPr sz="1350" b="1">
-                <a:solidFill>
-                  <a:srgbClr val="FFFFFF"/>
+              <a:defRPr sz="1125" b="1">
+                <a:solidFill>
+                  <a:srgbClr val="2C6E73"/>
                 </a:solidFill>
                 <a:latin typeface="Arial"/>
                 <a:ea typeface="Arial"/>
@@ -8336,9 +8338,9 @@
               </a:defRPr>
             </a:pPr>
             <a:r>
-              <a:rPr sz="1350" b="1">
-                <a:solidFill>
-                  <a:srgbClr val="FFFFFF"/>
+              <a:rPr sz="1125" b="1">
+                <a:solidFill>
+                  <a:srgbClr val="2C6E73"/>
                 </a:solidFill>
                 <a:latin typeface="Arial"/>
                 <a:ea typeface="Arial"/>
@@ -8354,19 +8356,19 @@
           <p:cNvPr id="13" name="">
             <a:extLst xmlns:a="http://schemas.openxmlformats.org/drawingml/2006/main">
               <a:ext uri="{FF2B5EF4-FFF2-40B4-BE49-F238E27FC236}">
-                <a16:creationId xmlns:a16="http://schemas.microsoft.com/office/drawing/2014/main" id="{94B29020-0F72-4F0B-AB57-2C0710374793}"/>
-              </a:ext>
-            </a:extLst>
-          </p:cNvPr>
-          <p:cNvSpPr>
-            <a:spLocks xmlns:a="http://schemas.openxmlformats.org/drawingml/2006/main" noGrp="1"/>
-          </p:cNvSpPr>
-          <p:nvPr/>
-        </p:nvSpPr>
-        <p:spPr>
-          <a:xfrm xmlns:a="http://schemas.openxmlformats.org/drawingml/2006/main">
-            <a:off x="1714500" y="2181225"/>
-            <a:ext cx="9429750" cy="609600"/>
+                <a16:creationId xmlns:a16="http://schemas.microsoft.com/office/drawing/2014/main" id="{CA47E951-49B5-4A68-8AE6-AE9AA4C1CA76}"/>
+              </a:ext>
+            </a:extLst>
+          </p:cNvPr>
+          <p:cNvSpPr>
+            <a:spLocks xmlns:a="http://schemas.openxmlformats.org/drawingml/2006/main" noGrp="1"/>
+          </p:cNvSpPr>
+          <p:nvPr/>
+        </p:nvSpPr>
+        <p:spPr>
+          <a:xfrm xmlns:a="http://schemas.openxmlformats.org/drawingml/2006/main">
+            <a:off x="1714500" y="2114550"/>
+            <a:ext cx="9525000" cy="638175"/>
           </a:xfrm>
           <a:prstGeom xmlns:a="http://schemas.openxmlformats.org/drawingml/2006/main" prst="rect">
             <a:avLst/>
@@ -8383,7 +8385,7 @@
           <a:lstStyle xmlns:a="http://schemas.openxmlformats.org/drawingml/2006/main"/>
           <a:p xmlns:a="http://schemas.openxmlformats.org/drawingml/2006/main">
             <a:pPr algn="l">
-              <a:defRPr sz="1500" b="0">
+              <a:defRPr sz="1575" b="0">
                 <a:solidFill>
                   <a:srgbClr val="17253A"/>
                 </a:solidFill>
@@ -8393,7 +8395,7 @@
               </a:defRPr>
             </a:pPr>
             <a:r>
-              <a:rPr sz="1500" b="0">
+              <a:rPr sz="1575" b="0">
                 <a:solidFill>
                   <a:srgbClr val="17253A"/>
                 </a:solidFill>
@@ -8401,7 +8403,7 @@
                 <a:ea typeface="Arial"/>
                 <a:cs typeface="Arial"/>
               </a:rPr>
-              <a:t>Identify the structure: Notice the number structure before choosing a method.</a:t>
+              <a:t>25 × 3,600</a:t>
             </a:r>
           </a:p>
         </p:txBody>
@@ -8411,28 +8413,30 @@
           <p:cNvPr id="14" name="">
             <a:extLst xmlns:a="http://schemas.openxmlformats.org/drawingml/2006/main">
               <a:ext uri="{FF2B5EF4-FFF2-40B4-BE49-F238E27FC236}">
-                <a16:creationId xmlns:a16="http://schemas.microsoft.com/office/drawing/2014/main" id="{39B6ADF6-6132-4BF8-BEA9-9E6334BFE7F9}"/>
-              </a:ext>
-            </a:extLst>
-          </p:cNvPr>
-          <p:cNvSpPr>
-            <a:spLocks xmlns:a="http://schemas.openxmlformats.org/drawingml/2006/main" noGrp="1"/>
-          </p:cNvSpPr>
-          <p:nvPr/>
-        </p:nvSpPr>
-        <p:spPr>
-          <a:xfrm xmlns:a="http://schemas.openxmlformats.org/drawingml/2006/main">
-            <a:off x="1000125" y="2990850"/>
-            <a:ext cx="476250" cy="476250"/>
-          </a:xfrm>
-          <a:prstGeom xmlns:a="http://schemas.openxmlformats.org/drawingml/2006/main" prst="ellipse">
+                <a16:creationId xmlns:a16="http://schemas.microsoft.com/office/drawing/2014/main" id="{507F9801-E40B-474D-BF49-CEA422204887}"/>
+              </a:ext>
+            </a:extLst>
+          </p:cNvPr>
+          <p:cNvSpPr>
+            <a:spLocks xmlns:a="http://schemas.openxmlformats.org/drawingml/2006/main" noGrp="1"/>
+          </p:cNvSpPr>
+          <p:nvPr/>
+        </p:nvSpPr>
+        <p:spPr>
+          <a:xfrm xmlns:a="http://schemas.openxmlformats.org/drawingml/2006/main">
+            <a:off x="1714500" y="2771775"/>
+            <a:ext cx="9334500" cy="9525"/>
+          </a:xfrm>
+          <a:prstGeom xmlns:a="http://schemas.openxmlformats.org/drawingml/2006/main" prst="rect">
             <a:avLst/>
           </a:prstGeom>
           <a:solidFill xmlns:a="http://schemas.openxmlformats.org/drawingml/2006/main">
-            <a:srgbClr val="2C6E73"/>
+            <a:srgbClr val="D9E0E6"/>
           </a:solidFill>
           <a:ln xmlns:a="http://schemas.openxmlformats.org/drawingml/2006/main" w="0">
-            <a:noFill/>
+            <a:solidFill>
+              <a:srgbClr val="D9E0E6"/>
+            </a:solidFill>
           </a:ln>
         </p:spPr>
       </p:sp>
@@ -8441,19 +8445,19 @@
           <p:cNvPr id="15" name="">
             <a:extLst xmlns:a="http://schemas.openxmlformats.org/drawingml/2006/main">
               <a:ext uri="{FF2B5EF4-FFF2-40B4-BE49-F238E27FC236}">
-                <a16:creationId xmlns:a16="http://schemas.microsoft.com/office/drawing/2014/main" id="{4C027F44-F034-43AE-B708-E2B63359F132}"/>
-              </a:ext>
-            </a:extLst>
-          </p:cNvPr>
-          <p:cNvSpPr>
-            <a:spLocks xmlns:a="http://schemas.openxmlformats.org/drawingml/2006/main" noGrp="1"/>
-          </p:cNvSpPr>
-          <p:nvPr/>
-        </p:nvSpPr>
-        <p:spPr>
-          <a:xfrm xmlns:a="http://schemas.openxmlformats.org/drawingml/2006/main">
-            <a:off x="1000125" y="3019425"/>
-            <a:ext cx="476250" cy="419100"/>
+                <a16:creationId xmlns:a16="http://schemas.microsoft.com/office/drawing/2014/main" id="{B50C2642-AC4C-4B2A-A899-BF24A104C173}"/>
+              </a:ext>
+            </a:extLst>
+          </p:cNvPr>
+          <p:cNvSpPr>
+            <a:spLocks xmlns:a="http://schemas.openxmlformats.org/drawingml/2006/main" noGrp="1"/>
+          </p:cNvSpPr>
+          <p:nvPr/>
+        </p:nvSpPr>
+        <p:spPr>
+          <a:xfrm xmlns:a="http://schemas.openxmlformats.org/drawingml/2006/main">
+            <a:off x="1162050" y="2905125"/>
+            <a:ext cx="400050" cy="400050"/>
           </a:xfrm>
           <a:prstGeom xmlns:a="http://schemas.openxmlformats.org/drawingml/2006/main" prst="rect">
             <a:avLst/>
@@ -8470,9 +8474,9 @@
           <a:lstStyle xmlns:a="http://schemas.openxmlformats.org/drawingml/2006/main"/>
           <a:p xmlns:a="http://schemas.openxmlformats.org/drawingml/2006/main">
             <a:pPr algn="ctr">
-              <a:defRPr sz="1350" b="1">
-                <a:solidFill>
-                  <a:srgbClr val="FFFFFF"/>
+              <a:defRPr sz="1125" b="1">
+                <a:solidFill>
+                  <a:srgbClr val="2C6E73"/>
                 </a:solidFill>
                 <a:latin typeface="Arial"/>
                 <a:ea typeface="Arial"/>
@@ -8480,9 +8484,9 @@
               </a:defRPr>
             </a:pPr>
             <a:r>
-              <a:rPr sz="1350" b="1">
-                <a:solidFill>
-                  <a:srgbClr val="FFFFFF"/>
+              <a:rPr sz="1125" b="1">
+                <a:solidFill>
+                  <a:srgbClr val="2C6E73"/>
                 </a:solidFill>
                 <a:latin typeface="Arial"/>
                 <a:ea typeface="Arial"/>
@@ -8498,19 +8502,19 @@
           <p:cNvPr id="16" name="">
             <a:extLst xmlns:a="http://schemas.openxmlformats.org/drawingml/2006/main">
               <a:ext uri="{FF2B5EF4-FFF2-40B4-BE49-F238E27FC236}">
-                <a16:creationId xmlns:a16="http://schemas.microsoft.com/office/drawing/2014/main" id="{E3F0DA2B-16A0-423A-B91D-AEE1E81B282E}"/>
-              </a:ext>
-            </a:extLst>
-          </p:cNvPr>
-          <p:cNvSpPr>
-            <a:spLocks xmlns:a="http://schemas.openxmlformats.org/drawingml/2006/main" noGrp="1"/>
-          </p:cNvSpPr>
-          <p:nvPr/>
-        </p:nvSpPr>
-        <p:spPr>
-          <a:xfrm xmlns:a="http://schemas.openxmlformats.org/drawingml/2006/main">
-            <a:off x="1714500" y="2924175"/>
-            <a:ext cx="9429750" cy="609600"/>
+                <a16:creationId xmlns:a16="http://schemas.microsoft.com/office/drawing/2014/main" id="{7CF0A9A7-6D11-4B0F-8DD2-66F65BCEB1CC}"/>
+              </a:ext>
+            </a:extLst>
+          </p:cNvPr>
+          <p:cNvSpPr>
+            <a:spLocks xmlns:a="http://schemas.openxmlformats.org/drawingml/2006/main" noGrp="1"/>
+          </p:cNvSpPr>
+          <p:nvPr/>
+        </p:nvSpPr>
+        <p:spPr>
+          <a:xfrm xmlns:a="http://schemas.openxmlformats.org/drawingml/2006/main">
+            <a:off x="1714500" y="2819400"/>
+            <a:ext cx="9525000" cy="638175"/>
           </a:xfrm>
           <a:prstGeom xmlns:a="http://schemas.openxmlformats.org/drawingml/2006/main" prst="rect">
             <a:avLst/>
@@ -8527,7 +8531,7 @@
           <a:lstStyle xmlns:a="http://schemas.openxmlformats.org/drawingml/2006/main"/>
           <a:p xmlns:a="http://schemas.openxmlformats.org/drawingml/2006/main">
             <a:pPr algn="l">
-              <a:defRPr sz="1500" b="0">
+              <a:defRPr sz="1575" b="0">
                 <a:solidFill>
                   <a:srgbClr val="17253A"/>
                 </a:solidFill>
@@ -8537,7 +8541,7 @@
               </a:defRPr>
             </a:pPr>
             <a:r>
-              <a:rPr sz="1500" b="0">
+              <a:rPr sz="1575" b="0">
                 <a:solidFill>
                   <a:srgbClr val="17253A"/>
                 </a:solidFill>
@@ -8545,7 +8549,7 @@
                 <a:ea typeface="Arial"/>
                 <a:cs typeface="Arial"/>
               </a:rPr>
-              <a:t>Set up the method: Use a known fact, partition or compensation to calculate efficiently.</a:t>
+              <a:t>25 × 36 × 100</a:t>
             </a:r>
           </a:p>
         </p:txBody>
@@ -8555,28 +8559,30 @@
           <p:cNvPr id="17" name="">
             <a:extLst xmlns:a="http://schemas.openxmlformats.org/drawingml/2006/main">
               <a:ext uri="{FF2B5EF4-FFF2-40B4-BE49-F238E27FC236}">
-                <a16:creationId xmlns:a16="http://schemas.microsoft.com/office/drawing/2014/main" id="{05203781-6B68-4403-8B90-9C75C4B06535}"/>
-              </a:ext>
-            </a:extLst>
-          </p:cNvPr>
-          <p:cNvSpPr>
-            <a:spLocks xmlns:a="http://schemas.openxmlformats.org/drawingml/2006/main" noGrp="1"/>
-          </p:cNvSpPr>
-          <p:nvPr/>
-        </p:nvSpPr>
-        <p:spPr>
-          <a:xfrm xmlns:a="http://schemas.openxmlformats.org/drawingml/2006/main">
-            <a:off x="1000125" y="3733800"/>
-            <a:ext cx="476250" cy="476250"/>
-          </a:xfrm>
-          <a:prstGeom xmlns:a="http://schemas.openxmlformats.org/drawingml/2006/main" prst="ellipse">
+                <a16:creationId xmlns:a16="http://schemas.microsoft.com/office/drawing/2014/main" id="{D5338340-4190-4A6C-9862-D80F045D7E7D}"/>
+              </a:ext>
+            </a:extLst>
+          </p:cNvPr>
+          <p:cNvSpPr>
+            <a:spLocks xmlns:a="http://schemas.openxmlformats.org/drawingml/2006/main" noGrp="1"/>
+          </p:cNvSpPr>
+          <p:nvPr/>
+        </p:nvSpPr>
+        <p:spPr>
+          <a:xfrm xmlns:a="http://schemas.openxmlformats.org/drawingml/2006/main">
+            <a:off x="1714500" y="3476625"/>
+            <a:ext cx="9334500" cy="9525"/>
+          </a:xfrm>
+          <a:prstGeom xmlns:a="http://schemas.openxmlformats.org/drawingml/2006/main" prst="rect">
             <a:avLst/>
           </a:prstGeom>
           <a:solidFill xmlns:a="http://schemas.openxmlformats.org/drawingml/2006/main">
-            <a:srgbClr val="2C6E73"/>
+            <a:srgbClr val="D9E0E6"/>
           </a:solidFill>
           <a:ln xmlns:a="http://schemas.openxmlformats.org/drawingml/2006/main" w="0">
-            <a:noFill/>
+            <a:solidFill>
+              <a:srgbClr val="D9E0E6"/>
+            </a:solidFill>
           </a:ln>
         </p:spPr>
       </p:sp>
@@ -8585,19 +8591,19 @@
           <p:cNvPr id="18" name="">
             <a:extLst xmlns:a="http://schemas.openxmlformats.org/drawingml/2006/main">
               <a:ext uri="{FF2B5EF4-FFF2-40B4-BE49-F238E27FC236}">
-                <a16:creationId xmlns:a16="http://schemas.microsoft.com/office/drawing/2014/main" id="{57412B43-F324-4938-9F58-681B254E7869}"/>
-              </a:ext>
-            </a:extLst>
-          </p:cNvPr>
-          <p:cNvSpPr>
-            <a:spLocks xmlns:a="http://schemas.openxmlformats.org/drawingml/2006/main" noGrp="1"/>
-          </p:cNvSpPr>
-          <p:nvPr/>
-        </p:nvSpPr>
-        <p:spPr>
-          <a:xfrm xmlns:a="http://schemas.openxmlformats.org/drawingml/2006/main">
-            <a:off x="1000125" y="3762375"/>
-            <a:ext cx="476250" cy="419100"/>
+                <a16:creationId xmlns:a16="http://schemas.microsoft.com/office/drawing/2014/main" id="{40871BCD-5C64-4F62-9BFB-32227BD26840}"/>
+              </a:ext>
+            </a:extLst>
+          </p:cNvPr>
+          <p:cNvSpPr>
+            <a:spLocks xmlns:a="http://schemas.openxmlformats.org/drawingml/2006/main" noGrp="1"/>
+          </p:cNvSpPr>
+          <p:nvPr/>
+        </p:nvSpPr>
+        <p:spPr>
+          <a:xfrm xmlns:a="http://schemas.openxmlformats.org/drawingml/2006/main">
+            <a:off x="1162050" y="3609975"/>
+            <a:ext cx="400050" cy="400050"/>
           </a:xfrm>
           <a:prstGeom xmlns:a="http://schemas.openxmlformats.org/drawingml/2006/main" prst="rect">
             <a:avLst/>
@@ -8614,9 +8620,9 @@
           <a:lstStyle xmlns:a="http://schemas.openxmlformats.org/drawingml/2006/main"/>
           <a:p xmlns:a="http://schemas.openxmlformats.org/drawingml/2006/main">
             <a:pPr algn="ctr">
-              <a:defRPr sz="1350" b="1">
-                <a:solidFill>
-                  <a:srgbClr val="FFFFFF"/>
+              <a:defRPr sz="1125" b="1">
+                <a:solidFill>
+                  <a:srgbClr val="2C6E73"/>
                 </a:solidFill>
                 <a:latin typeface="Arial"/>
                 <a:ea typeface="Arial"/>
@@ -8624,9 +8630,9 @@
               </a:defRPr>
             </a:pPr>
             <a:r>
-              <a:rPr sz="1350" b="1">
-                <a:solidFill>
-                  <a:srgbClr val="FFFFFF"/>
+              <a:rPr sz="1125" b="1">
+                <a:solidFill>
+                  <a:srgbClr val="2C6E73"/>
                 </a:solidFill>
                 <a:latin typeface="Arial"/>
                 <a:ea typeface="Arial"/>
@@ -8642,19 +8648,19 @@
           <p:cNvPr id="19" name="">
             <a:extLst xmlns:a="http://schemas.openxmlformats.org/drawingml/2006/main">
               <a:ext uri="{FF2B5EF4-FFF2-40B4-BE49-F238E27FC236}">
-                <a16:creationId xmlns:a16="http://schemas.microsoft.com/office/drawing/2014/main" id="{81677293-6E0A-4ECE-BEAE-F1B3762F3BE1}"/>
-              </a:ext>
-            </a:extLst>
-          </p:cNvPr>
-          <p:cNvSpPr>
-            <a:spLocks xmlns:a="http://schemas.openxmlformats.org/drawingml/2006/main" noGrp="1"/>
-          </p:cNvSpPr>
-          <p:nvPr/>
-        </p:nvSpPr>
-        <p:spPr>
-          <a:xfrm xmlns:a="http://schemas.openxmlformats.org/drawingml/2006/main">
-            <a:off x="1714500" y="3667125"/>
-            <a:ext cx="9429750" cy="609600"/>
+                <a16:creationId xmlns:a16="http://schemas.microsoft.com/office/drawing/2014/main" id="{03191081-815A-459A-AC1E-402E911A9CC9}"/>
+              </a:ext>
+            </a:extLst>
+          </p:cNvPr>
+          <p:cNvSpPr>
+            <a:spLocks xmlns:a="http://schemas.openxmlformats.org/drawingml/2006/main" noGrp="1"/>
+          </p:cNvSpPr>
+          <p:nvPr/>
+        </p:nvSpPr>
+        <p:spPr>
+          <a:xfrm xmlns:a="http://schemas.openxmlformats.org/drawingml/2006/main">
+            <a:off x="1714500" y="3524250"/>
+            <a:ext cx="9525000" cy="638175"/>
           </a:xfrm>
           <a:prstGeom xmlns:a="http://schemas.openxmlformats.org/drawingml/2006/main" prst="rect">
             <a:avLst/>
@@ -8671,7 +8677,7 @@
           <a:lstStyle xmlns:a="http://schemas.openxmlformats.org/drawingml/2006/main"/>
           <a:p xmlns:a="http://schemas.openxmlformats.org/drawingml/2006/main">
             <a:pPr algn="l">
-              <a:defRPr sz="1500" b="0">
+              <a:defRPr sz="1575" b="0">
                 <a:solidFill>
                   <a:srgbClr val="17253A"/>
                 </a:solidFill>
@@ -8681,7 +8687,7 @@
               </a:defRPr>
             </a:pPr>
             <a:r>
-              <a:rPr sz="1500" b="0">
+              <a:rPr sz="1575" b="0">
                 <a:solidFill>
                   <a:srgbClr val="17253A"/>
                 </a:solidFill>
@@ -8689,7 +8695,7 @@
                 <a:ea typeface="Arial"/>
                 <a:cs typeface="Arial"/>
               </a:rPr>
-              <a:t>Complete the calculation: 90,000.</a:t>
+              <a:t>25 × 36 = 900</a:t>
             </a:r>
           </a:p>
         </p:txBody>
@@ -8699,28 +8705,30 @@
           <p:cNvPr id="20" name="">
             <a:extLst xmlns:a="http://schemas.openxmlformats.org/drawingml/2006/main">
               <a:ext uri="{FF2B5EF4-FFF2-40B4-BE49-F238E27FC236}">
-                <a16:creationId xmlns:a16="http://schemas.microsoft.com/office/drawing/2014/main" id="{5861D2E0-2A08-4B27-B378-389B038DF11D}"/>
-              </a:ext>
-            </a:extLst>
-          </p:cNvPr>
-          <p:cNvSpPr>
-            <a:spLocks xmlns:a="http://schemas.openxmlformats.org/drawingml/2006/main" noGrp="1"/>
-          </p:cNvSpPr>
-          <p:nvPr/>
-        </p:nvSpPr>
-        <p:spPr>
-          <a:xfrm xmlns:a="http://schemas.openxmlformats.org/drawingml/2006/main">
-            <a:off x="1000125" y="4476750"/>
-            <a:ext cx="476250" cy="476250"/>
-          </a:xfrm>
-          <a:prstGeom xmlns:a="http://schemas.openxmlformats.org/drawingml/2006/main" prst="ellipse">
+                <a16:creationId xmlns:a16="http://schemas.microsoft.com/office/drawing/2014/main" id="{99703528-81E2-48C5-B9B0-2AD62E9F8FBD}"/>
+              </a:ext>
+            </a:extLst>
+          </p:cNvPr>
+          <p:cNvSpPr>
+            <a:spLocks xmlns:a="http://schemas.openxmlformats.org/drawingml/2006/main" noGrp="1"/>
+          </p:cNvSpPr>
+          <p:nvPr/>
+        </p:nvSpPr>
+        <p:spPr>
+          <a:xfrm xmlns:a="http://schemas.openxmlformats.org/drawingml/2006/main">
+            <a:off x="1714500" y="4181475"/>
+            <a:ext cx="9334500" cy="9525"/>
+          </a:xfrm>
+          <a:prstGeom xmlns:a="http://schemas.openxmlformats.org/drawingml/2006/main" prst="rect">
             <a:avLst/>
           </a:prstGeom>
           <a:solidFill xmlns:a="http://schemas.openxmlformats.org/drawingml/2006/main">
-            <a:srgbClr val="2C6E73"/>
+            <a:srgbClr val="D9E0E6"/>
           </a:solidFill>
           <a:ln xmlns:a="http://schemas.openxmlformats.org/drawingml/2006/main" w="0">
-            <a:noFill/>
+            <a:solidFill>
+              <a:srgbClr val="D9E0E6"/>
+            </a:solidFill>
           </a:ln>
         </p:spPr>
       </p:sp>
@@ -8729,19 +8737,19 @@
           <p:cNvPr id="21" name="">
             <a:extLst xmlns:a="http://schemas.openxmlformats.org/drawingml/2006/main">
               <a:ext uri="{FF2B5EF4-FFF2-40B4-BE49-F238E27FC236}">
-                <a16:creationId xmlns:a16="http://schemas.microsoft.com/office/drawing/2014/main" id="{794713AB-18F0-4E30-8A9E-17B74B2189CB}"/>
-              </a:ext>
-            </a:extLst>
-          </p:cNvPr>
-          <p:cNvSpPr>
-            <a:spLocks xmlns:a="http://schemas.openxmlformats.org/drawingml/2006/main" noGrp="1"/>
-          </p:cNvSpPr>
-          <p:nvPr/>
-        </p:nvSpPr>
-        <p:spPr>
-          <a:xfrm xmlns:a="http://schemas.openxmlformats.org/drawingml/2006/main">
-            <a:off x="1000125" y="4505325"/>
-            <a:ext cx="476250" cy="419100"/>
+                <a16:creationId xmlns:a16="http://schemas.microsoft.com/office/drawing/2014/main" id="{752EBE74-2444-4C58-8031-4C32047379B1}"/>
+              </a:ext>
+            </a:extLst>
+          </p:cNvPr>
+          <p:cNvSpPr>
+            <a:spLocks xmlns:a="http://schemas.openxmlformats.org/drawingml/2006/main" noGrp="1"/>
+          </p:cNvSpPr>
+          <p:nvPr/>
+        </p:nvSpPr>
+        <p:spPr>
+          <a:xfrm xmlns:a="http://schemas.openxmlformats.org/drawingml/2006/main">
+            <a:off x="1162050" y="4314825"/>
+            <a:ext cx="400050" cy="400050"/>
           </a:xfrm>
           <a:prstGeom xmlns:a="http://schemas.openxmlformats.org/drawingml/2006/main" prst="rect">
             <a:avLst/>
@@ -8758,9 +8766,9 @@
           <a:lstStyle xmlns:a="http://schemas.openxmlformats.org/drawingml/2006/main"/>
           <a:p xmlns:a="http://schemas.openxmlformats.org/drawingml/2006/main">
             <a:pPr algn="ctr">
-              <a:defRPr sz="1350" b="1">
-                <a:solidFill>
-                  <a:srgbClr val="FFFFFF"/>
+              <a:defRPr sz="1125" b="1">
+                <a:solidFill>
+                  <a:srgbClr val="2C6E73"/>
                 </a:solidFill>
                 <a:latin typeface="Arial"/>
                 <a:ea typeface="Arial"/>
@@ -8768,9 +8776,9 @@
               </a:defRPr>
             </a:pPr>
             <a:r>
-              <a:rPr sz="1350" b="1">
-                <a:solidFill>
-                  <a:srgbClr val="FFFFFF"/>
+              <a:rPr sz="1125" b="1">
+                <a:solidFill>
+                  <a:srgbClr val="2C6E73"/>
                 </a:solidFill>
                 <a:latin typeface="Arial"/>
                 <a:ea typeface="Arial"/>
@@ -8786,19 +8794,19 @@
           <p:cNvPr id="22" name="">
             <a:extLst xmlns:a="http://schemas.openxmlformats.org/drawingml/2006/main">
               <a:ext uri="{FF2B5EF4-FFF2-40B4-BE49-F238E27FC236}">
-                <a16:creationId xmlns:a16="http://schemas.microsoft.com/office/drawing/2014/main" id="{7B28D211-D526-4FAA-A69A-087395306C3B}"/>
-              </a:ext>
-            </a:extLst>
-          </p:cNvPr>
-          <p:cNvSpPr>
-            <a:spLocks xmlns:a="http://schemas.openxmlformats.org/drawingml/2006/main" noGrp="1"/>
-          </p:cNvSpPr>
-          <p:nvPr/>
-        </p:nvSpPr>
-        <p:spPr>
-          <a:xfrm xmlns:a="http://schemas.openxmlformats.org/drawingml/2006/main">
-            <a:off x="1714500" y="4410075"/>
-            <a:ext cx="9429750" cy="609600"/>
+                <a16:creationId xmlns:a16="http://schemas.microsoft.com/office/drawing/2014/main" id="{BA89FF90-D228-457A-B6FD-1E44C7E3D5FC}"/>
+              </a:ext>
+            </a:extLst>
+          </p:cNvPr>
+          <p:cNvSpPr>
+            <a:spLocks xmlns:a="http://schemas.openxmlformats.org/drawingml/2006/main" noGrp="1"/>
+          </p:cNvSpPr>
+          <p:nvPr/>
+        </p:nvSpPr>
+        <p:spPr>
+          <a:xfrm xmlns:a="http://schemas.openxmlformats.org/drawingml/2006/main">
+            <a:off x="1714500" y="4229100"/>
+            <a:ext cx="9525000" cy="638175"/>
           </a:xfrm>
           <a:prstGeom xmlns:a="http://schemas.openxmlformats.org/drawingml/2006/main" prst="rect">
             <a:avLst/>
@@ -8815,9 +8823,9 @@
           <a:lstStyle xmlns:a="http://schemas.openxmlformats.org/drawingml/2006/main"/>
           <a:p xmlns:a="http://schemas.openxmlformats.org/drawingml/2006/main">
             <a:pPr algn="l">
-              <a:defRPr sz="1500" b="1">
-                <a:solidFill>
-                  <a:srgbClr val="2F785D"/>
+              <a:defRPr sz="1575" b="0">
+                <a:solidFill>
+                  <a:srgbClr val="17253A"/>
                 </a:solidFill>
                 <a:latin typeface="Arial"/>
                 <a:ea typeface="Arial"/>
@@ -8825,15 +8833,161 @@
               </a:defRPr>
             </a:pPr>
             <a:r>
-              <a:rPr sz="1500" b="1">
+              <a:rPr sz="1575" b="0">
+                <a:solidFill>
+                  <a:srgbClr val="17253A"/>
+                </a:solidFill>
+                <a:latin typeface="Arial"/>
+                <a:ea typeface="Arial"/>
+                <a:cs typeface="Arial"/>
+              </a:rPr>
+              <a:t>900 × 100</a:t>
+            </a:r>
+          </a:p>
+        </p:txBody>
+      </p:sp>
+      <p:sp>
+        <p:nvSpPr>
+          <p:cNvPr id="23" name="">
+            <a:extLst xmlns:a="http://schemas.openxmlformats.org/drawingml/2006/main">
+              <a:ext uri="{FF2B5EF4-FFF2-40B4-BE49-F238E27FC236}">
+                <a16:creationId xmlns:a16="http://schemas.microsoft.com/office/drawing/2014/main" id="{326ECAAB-B738-4FEE-83F0-7C4044743252}"/>
+              </a:ext>
+            </a:extLst>
+          </p:cNvPr>
+          <p:cNvSpPr>
+            <a:spLocks xmlns:a="http://schemas.openxmlformats.org/drawingml/2006/main" noGrp="1"/>
+          </p:cNvSpPr>
+          <p:nvPr/>
+        </p:nvSpPr>
+        <p:spPr>
+          <a:xfrm xmlns:a="http://schemas.openxmlformats.org/drawingml/2006/main">
+            <a:off x="1714500" y="4886325"/>
+            <a:ext cx="9334500" cy="9525"/>
+          </a:xfrm>
+          <a:prstGeom xmlns:a="http://schemas.openxmlformats.org/drawingml/2006/main" prst="rect">
+            <a:avLst/>
+          </a:prstGeom>
+          <a:solidFill xmlns:a="http://schemas.openxmlformats.org/drawingml/2006/main">
+            <a:srgbClr val="D9E0E6"/>
+          </a:solidFill>
+          <a:ln xmlns:a="http://schemas.openxmlformats.org/drawingml/2006/main" w="0">
+            <a:solidFill>
+              <a:srgbClr val="D9E0E6"/>
+            </a:solidFill>
+          </a:ln>
+        </p:spPr>
+      </p:sp>
+      <p:sp>
+        <p:nvSpPr>
+          <p:cNvPr id="24" name="">
+            <a:extLst xmlns:a="http://schemas.openxmlformats.org/drawingml/2006/main">
+              <a:ext uri="{FF2B5EF4-FFF2-40B4-BE49-F238E27FC236}">
+                <a16:creationId xmlns:a16="http://schemas.microsoft.com/office/drawing/2014/main" id="{FA4876A4-8713-4829-A065-FE5D8FA2DC7E}"/>
+              </a:ext>
+            </a:extLst>
+          </p:cNvPr>
+          <p:cNvSpPr>
+            <a:spLocks xmlns:a="http://schemas.openxmlformats.org/drawingml/2006/main" noGrp="1"/>
+          </p:cNvSpPr>
+          <p:nvPr/>
+        </p:nvSpPr>
+        <p:spPr>
+          <a:xfrm xmlns:a="http://schemas.openxmlformats.org/drawingml/2006/main">
+            <a:off x="1162050" y="5019675"/>
+            <a:ext cx="400050" cy="400050"/>
+          </a:xfrm>
+          <a:prstGeom xmlns:a="http://schemas.openxmlformats.org/drawingml/2006/main" prst="rect">
+            <a:avLst/>
+          </a:prstGeom>
+          <a:noFill xmlns:a="http://schemas.openxmlformats.org/drawingml/2006/main"/>
+          <a:ln xmlns:a="http://schemas.openxmlformats.org/drawingml/2006/main" w="0">
+            <a:noFill/>
+          </a:ln>
+        </p:spPr>
+        <p:txBody>
+          <a:bodyPr xmlns:a="http://schemas.openxmlformats.org/drawingml/2006/main" anchor="ctr">
+            <a:normAutofit fontScale="100000"/>
+          </a:bodyPr>
+          <a:lstStyle xmlns:a="http://schemas.openxmlformats.org/drawingml/2006/main"/>
+          <a:p xmlns:a="http://schemas.openxmlformats.org/drawingml/2006/main">
+            <a:pPr algn="ctr">
+              <a:defRPr sz="1125" b="1">
                 <a:solidFill>
                   <a:srgbClr val="2F785D"/>
                 </a:solidFill>
                 <a:latin typeface="Arial"/>
                 <a:ea typeface="Arial"/>
                 <a:cs typeface="Arial"/>
+              </a:defRPr>
+            </a:pPr>
+            <a:r>
+              <a:rPr sz="1125" b="1">
+                <a:solidFill>
+                  <a:srgbClr val="2F785D"/>
+                </a:solidFill>
+                <a:latin typeface="Arial"/>
+                <a:ea typeface="Arial"/>
+                <a:cs typeface="Arial"/>
               </a:rPr>
-              <a:t>Check the result: Check the size of the result using estimation or an inverse operation.</a:t>
+              <a:t>5</a:t>
+            </a:r>
+          </a:p>
+        </p:txBody>
+      </p:sp>
+      <p:sp>
+        <p:nvSpPr>
+          <p:cNvPr id="25" name="">
+            <a:extLst xmlns:a="http://schemas.openxmlformats.org/drawingml/2006/main">
+              <a:ext uri="{FF2B5EF4-FFF2-40B4-BE49-F238E27FC236}">
+                <a16:creationId xmlns:a16="http://schemas.microsoft.com/office/drawing/2014/main" id="{CF9B20EF-6AA0-4855-9B81-E10E40E539B2}"/>
+              </a:ext>
+            </a:extLst>
+          </p:cNvPr>
+          <p:cNvSpPr>
+            <a:spLocks xmlns:a="http://schemas.openxmlformats.org/drawingml/2006/main" noGrp="1"/>
+          </p:cNvSpPr>
+          <p:nvPr/>
+        </p:nvSpPr>
+        <p:spPr>
+          <a:xfrm xmlns:a="http://schemas.openxmlformats.org/drawingml/2006/main">
+            <a:off x="1714500" y="4933950"/>
+            <a:ext cx="9525000" cy="638175"/>
+          </a:xfrm>
+          <a:prstGeom xmlns:a="http://schemas.openxmlformats.org/drawingml/2006/main" prst="rect">
+            <a:avLst/>
+          </a:prstGeom>
+          <a:noFill xmlns:a="http://schemas.openxmlformats.org/drawingml/2006/main"/>
+          <a:ln xmlns:a="http://schemas.openxmlformats.org/drawingml/2006/main" w="0">
+            <a:noFill/>
+          </a:ln>
+        </p:spPr>
+        <p:txBody>
+          <a:bodyPr xmlns:a="http://schemas.openxmlformats.org/drawingml/2006/main" anchor="ctr">
+            <a:normAutofit fontScale="100000"/>
+          </a:bodyPr>
+          <a:lstStyle xmlns:a="http://schemas.openxmlformats.org/drawingml/2006/main"/>
+          <a:p xmlns:a="http://schemas.openxmlformats.org/drawingml/2006/main">
+            <a:pPr algn="l">
+              <a:defRPr sz="1575" b="1">
+                <a:solidFill>
+                  <a:srgbClr val="2F785D"/>
+                </a:solidFill>
+                <a:latin typeface="Arial"/>
+                <a:ea typeface="Arial"/>
+                <a:cs typeface="Arial"/>
+              </a:defRPr>
+            </a:pPr>
+            <a:r>
+              <a:rPr sz="1575" b="1">
+                <a:solidFill>
+                  <a:srgbClr val="2F785D"/>
+                </a:solidFill>
+                <a:latin typeface="Arial"/>
+                <a:ea typeface="Arial"/>
+                <a:cs typeface="Arial"/>
+              </a:rPr>
+              <a:t>90,000</a:t>
             </a:r>
           </a:p>
         </p:txBody>
@@ -8841,7 +8995,7 @@
     </p:spTree>
     <p:extLst>
       <p:ext uri="{BB962C8B-B14F-4D97-AF65-F5344CB8AC3E}">
-        <p14:creationId xmlns:p14="http://schemas.microsoft.com/office/powerpoint/2010/main" val="355493707"/>
+        <p14:creationId xmlns:p14="http://schemas.microsoft.com/office/powerpoint/2010/main" val="152818781"/>
       </p:ext>
     </p:extLst>
   </p:cSld>
@@ -9078,6 +9232,51 @@
                       </p:childTnLst>
                     </p:cTn>
                   </p:par>
+                  <p:par>
+                    <p:cTn id="23" fill="hold">
+                      <p:stCondLst>
+                        <p:cond delay="indefinite"/>
+                      </p:stCondLst>
+                      <p:childTnLst>
+                        <p:par>
+                          <p:cTn id="24" fill="hold">
+                            <p:stCondLst>
+                              <p:cond delay="0"/>
+                            </p:stCondLst>
+                            <p:childTnLst>
+                              <p:par>
+                                <p:cTn id="25" presetID="1" presetClass="entr" presetSubtype="0" fill="hold" grpId="0" nodeType="clickEffect">
+                                  <p:stCondLst>
+                                    <p:cond delay="0"/>
+                                  </p:stCondLst>
+                                  <p:childTnLst>
+                                    <p:set>
+                                      <p:cBhvr>
+                                        <p:cTn id="26" dur="1" fill="hold">
+                                          <p:stCondLst>
+                                            <p:cond delay="0"/>
+                                          </p:stCondLst>
+                                        </p:cTn>
+                                        <p:tgtEl>
+                                          <p:spTgt spid="25"/>
+                                        </p:tgtEl>
+                                        <p:attrNameLst>
+                                          <p:attrName>style.visibility</p:attrName>
+                                        </p:attrNameLst>
+                                      </p:cBhvr>
+                                      <p:to>
+                                        <p:strVal val="visible"/>
+                                      </p:to>
+                                    </p:set>
+                                  </p:childTnLst>
+                                </p:cTn>
+                              </p:par>
+                            </p:childTnLst>
+                          </p:cTn>
+                        </p:par>
+                      </p:childTnLst>
+                    </p:cTn>
+                  </p:par>
                 </p:childTnLst>
               </p:cTn>
               <p:prevCondLst>
@@ -9105,6 +9304,7 @@
       <p:bldP spid="16" grpId="0"/>
       <p:bldP spid="19" grpId="0"/>
       <p:bldP spid="22" grpId="0"/>
+      <p:bldP spid="25" grpId="0"/>
     </p:bldLst>
   </p:timing>
 </p:sld>
@@ -9134,7 +9334,7 @@
           <p:cNvPr id="15" name="">
             <a:extLst xmlns:a="http://schemas.openxmlformats.org/drawingml/2006/main">
               <a:ext uri="{FF2B5EF4-FFF2-40B4-BE49-F238E27FC236}">
-                <a16:creationId xmlns:a16="http://schemas.microsoft.com/office/drawing/2014/main" id="{30B9CCC2-0C44-4D62-9395-80FF2928814E}"/>
+                <a16:creationId xmlns:a16="http://schemas.microsoft.com/office/drawing/2014/main" id="{03B43FAB-08F4-413C-89A3-E3099765D6C0}"/>
               </a:ext>
             </a:extLst>
           </p:cNvPr>
@@ -9166,7 +9366,7 @@
           <p:cNvPr id="2" name="">
             <a:extLst xmlns:a="http://schemas.openxmlformats.org/drawingml/2006/main">
               <a:ext uri="{FF2B5EF4-FFF2-40B4-BE49-F238E27FC236}">
-                <a16:creationId xmlns:a16="http://schemas.microsoft.com/office/drawing/2014/main" id="{FD6540D8-BA14-468E-B32E-5704FC656390}"/>
+                <a16:creationId xmlns:a16="http://schemas.microsoft.com/office/drawing/2014/main" id="{F0C9BCD1-CCF0-43C3-A1A9-C9B790684100}"/>
               </a:ext>
             </a:extLst>
           </p:cNvPr>
@@ -9223,7 +9423,7 @@
           <p:cNvPr id="3" name="">
             <a:extLst xmlns:a="http://schemas.openxmlformats.org/drawingml/2006/main">
               <a:ext uri="{FF2B5EF4-FFF2-40B4-BE49-F238E27FC236}">
-                <a16:creationId xmlns:a16="http://schemas.microsoft.com/office/drawing/2014/main" id="{70F7EF44-033A-4EA0-8940-759221BA43CF}"/>
+                <a16:creationId xmlns:a16="http://schemas.microsoft.com/office/drawing/2014/main" id="{7DE3A825-035D-427F-A24B-F450AAB304D4}"/>
               </a:ext>
             </a:extLst>
           </p:cNvPr>
@@ -9255,7 +9455,7 @@
           <p:cNvPr id="4" name="">
             <a:extLst xmlns:a="http://schemas.openxmlformats.org/drawingml/2006/main">
               <a:ext uri="{FF2B5EF4-FFF2-40B4-BE49-F238E27FC236}">
-                <a16:creationId xmlns:a16="http://schemas.microsoft.com/office/drawing/2014/main" id="{5909CEEA-87DE-4221-8F86-0837A99BAE9C}"/>
+                <a16:creationId xmlns:a16="http://schemas.microsoft.com/office/drawing/2014/main" id="{67B23EC7-C899-4E25-9722-071A9EA84C6B}"/>
               </a:ext>
             </a:extLst>
           </p:cNvPr>
@@ -9312,7 +9512,7 @@
           <p:cNvPr id="5" name="">
             <a:extLst xmlns:a="http://schemas.openxmlformats.org/drawingml/2006/main">
               <a:ext uri="{FF2B5EF4-FFF2-40B4-BE49-F238E27FC236}">
-                <a16:creationId xmlns:a16="http://schemas.microsoft.com/office/drawing/2014/main" id="{9B6706A6-9BC3-4D85-9828-6472D95099D1}"/>
+                <a16:creationId xmlns:a16="http://schemas.microsoft.com/office/drawing/2014/main" id="{318F4975-B3E4-40A7-9F55-F11663B9CEE7}"/>
               </a:ext>
             </a:extLst>
           </p:cNvPr>
@@ -9369,7 +9569,7 @@
           <p:cNvPr id="6" name="">
             <a:extLst xmlns:a="http://schemas.openxmlformats.org/drawingml/2006/main">
               <a:ext uri="{FF2B5EF4-FFF2-40B4-BE49-F238E27FC236}">
-                <a16:creationId xmlns:a16="http://schemas.microsoft.com/office/drawing/2014/main" id="{664AB2FB-7C39-4746-9814-6B33E3D3AD38}"/>
+                <a16:creationId xmlns:a16="http://schemas.microsoft.com/office/drawing/2014/main" id="{AEFF7432-9951-43B3-B1BE-DF657B69F1C1}"/>
               </a:ext>
             </a:extLst>
           </p:cNvPr>
@@ -9426,7 +9626,7 @@
           <p:cNvPr id="7" name="">
             <a:extLst xmlns:a="http://schemas.openxmlformats.org/drawingml/2006/main">
               <a:ext uri="{FF2B5EF4-FFF2-40B4-BE49-F238E27FC236}">
-                <a16:creationId xmlns:a16="http://schemas.microsoft.com/office/drawing/2014/main" id="{295CE501-4194-4B7A-B76A-D98CB8D3E9C8}"/>
+                <a16:creationId xmlns:a16="http://schemas.microsoft.com/office/drawing/2014/main" id="{494EA119-C03C-4048-A1D7-C844F6FAF056}"/>
               </a:ext>
             </a:extLst>
           </p:cNvPr>
@@ -9458,7 +9658,7 @@
           <p:cNvPr id="8" name="">
             <a:extLst xmlns:a="http://schemas.openxmlformats.org/drawingml/2006/main">
               <a:ext uri="{FF2B5EF4-FFF2-40B4-BE49-F238E27FC236}">
-                <a16:creationId xmlns:a16="http://schemas.microsoft.com/office/drawing/2014/main" id="{8010C61D-6DEB-4BCE-B4CC-C6C22609E8AA}"/>
+                <a16:creationId xmlns:a16="http://schemas.microsoft.com/office/drawing/2014/main" id="{85E51197-2F31-4989-B4CD-8BEC9D6EE9B2}"/>
               </a:ext>
             </a:extLst>
           </p:cNvPr>
@@ -9515,7 +9715,7 @@
           <p:cNvPr id="9" name="">
             <a:extLst xmlns:a="http://schemas.openxmlformats.org/drawingml/2006/main">
               <a:ext uri="{FF2B5EF4-FFF2-40B4-BE49-F238E27FC236}">
-                <a16:creationId xmlns:a16="http://schemas.microsoft.com/office/drawing/2014/main" id="{405F61E3-467A-4725-B1D6-E1A66368163F}"/>
+                <a16:creationId xmlns:a16="http://schemas.microsoft.com/office/drawing/2014/main" id="{3807503A-52AD-49ED-B875-6BE218F797AC}"/>
               </a:ext>
             </a:extLst>
           </p:cNvPr>
@@ -9572,7 +9772,7 @@
           <p:cNvPr id="10" name="">
             <a:extLst xmlns:a="http://schemas.openxmlformats.org/drawingml/2006/main">
               <a:ext uri="{FF2B5EF4-FFF2-40B4-BE49-F238E27FC236}">
-                <a16:creationId xmlns:a16="http://schemas.microsoft.com/office/drawing/2014/main" id="{CC33DD37-1DA4-4DEF-8A24-210AF2FD3696}"/>
+                <a16:creationId xmlns:a16="http://schemas.microsoft.com/office/drawing/2014/main" id="{68D0F1ED-FA52-4DCD-B720-D8FEB9962CA1}"/>
               </a:ext>
             </a:extLst>
           </p:cNvPr>
@@ -9629,7 +9829,7 @@
           <p:cNvPr id="11" name="">
             <a:extLst xmlns:a="http://schemas.openxmlformats.org/drawingml/2006/main">
               <a:ext uri="{FF2B5EF4-FFF2-40B4-BE49-F238E27FC236}">
-                <a16:creationId xmlns:a16="http://schemas.microsoft.com/office/drawing/2014/main" id="{958BB28A-0CAC-4A4F-9971-5E9ED1606354}"/>
+                <a16:creationId xmlns:a16="http://schemas.microsoft.com/office/drawing/2014/main" id="{B7D132FB-F1D1-43B0-84DB-7915AFDCD17A}"/>
               </a:ext>
             </a:extLst>
           </p:cNvPr>
@@ -9686,7 +9886,7 @@
           <p:cNvPr id="12" name="">
             <a:extLst xmlns:a="http://schemas.openxmlformats.org/drawingml/2006/main">
               <a:ext uri="{FF2B5EF4-FFF2-40B4-BE49-F238E27FC236}">
-                <a16:creationId xmlns:a16="http://schemas.microsoft.com/office/drawing/2014/main" id="{D0A989AD-7727-4258-AFCE-E41F1462E1D7}"/>
+                <a16:creationId xmlns:a16="http://schemas.microsoft.com/office/drawing/2014/main" id="{9545C054-AACC-42B6-8F4E-67C0D4D93AF0}"/>
               </a:ext>
             </a:extLst>
           </p:cNvPr>
@@ -9718,7 +9918,7 @@
           <p:cNvPr id="13" name="">
             <a:extLst xmlns:a="http://schemas.openxmlformats.org/drawingml/2006/main">
               <a:ext uri="{FF2B5EF4-FFF2-40B4-BE49-F238E27FC236}">
-                <a16:creationId xmlns:a16="http://schemas.microsoft.com/office/drawing/2014/main" id="{35F55687-378A-4DDB-A783-9CEDFD238ED4}"/>
+                <a16:creationId xmlns:a16="http://schemas.microsoft.com/office/drawing/2014/main" id="{E7EDFD31-7ACB-4E7C-A71A-CE936813E877}"/>
               </a:ext>
             </a:extLst>
           </p:cNvPr>
@@ -9775,7 +9975,7 @@
           <p:cNvPr id="14" name="">
             <a:extLst xmlns:a="http://schemas.openxmlformats.org/drawingml/2006/main">
               <a:ext uri="{FF2B5EF4-FFF2-40B4-BE49-F238E27FC236}">
-                <a16:creationId xmlns:a16="http://schemas.microsoft.com/office/drawing/2014/main" id="{8AD2D90F-9B65-4BDA-8ACD-685C0DDF671F}"/>
+                <a16:creationId xmlns:a16="http://schemas.microsoft.com/office/drawing/2014/main" id="{FF80EA1C-AE21-4711-BF94-CDB1A0F8BCF4}"/>
               </a:ext>
             </a:extLst>
           </p:cNvPr>
@@ -9830,7 +10030,7 @@
     </p:spTree>
     <p:extLst>
       <p:ext uri="{BB962C8B-B14F-4D97-AF65-F5344CB8AC3E}">
-        <p14:creationId xmlns:p14="http://schemas.microsoft.com/office/powerpoint/2010/main" val="269086677"/>
+        <p14:creationId xmlns:p14="http://schemas.microsoft.com/office/powerpoint/2010/main" val="1583711291"/>
       </p:ext>
     </p:extLst>
   </p:cSld>
@@ -10031,7 +10231,7 @@
           <p:cNvPr id="16" name="">
             <a:extLst xmlns:a="http://schemas.openxmlformats.org/drawingml/2006/main">
               <a:ext uri="{FF2B5EF4-FFF2-40B4-BE49-F238E27FC236}">
-                <a16:creationId xmlns:a16="http://schemas.microsoft.com/office/drawing/2014/main" id="{927F12AD-E434-4586-BCC3-B839FF7B9CAC}"/>
+                <a16:creationId xmlns:a16="http://schemas.microsoft.com/office/drawing/2014/main" id="{74D19D8C-6723-4A26-9040-06AE64701500}"/>
               </a:ext>
             </a:extLst>
           </p:cNvPr>
@@ -10063,7 +10263,7 @@
           <p:cNvPr id="2" name="">
             <a:extLst xmlns:a="http://schemas.openxmlformats.org/drawingml/2006/main">
               <a:ext uri="{FF2B5EF4-FFF2-40B4-BE49-F238E27FC236}">
-                <a16:creationId xmlns:a16="http://schemas.microsoft.com/office/drawing/2014/main" id="{E0835C87-DF58-44A8-9B2E-AB62C502C738}"/>
+                <a16:creationId xmlns:a16="http://schemas.microsoft.com/office/drawing/2014/main" id="{2FB9A721-C800-45B5-A3F9-B8A1CEFD5241}"/>
               </a:ext>
             </a:extLst>
           </p:cNvPr>
@@ -10120,7 +10320,7 @@
           <p:cNvPr id="3" name="">
             <a:extLst xmlns:a="http://schemas.openxmlformats.org/drawingml/2006/main">
               <a:ext uri="{FF2B5EF4-FFF2-40B4-BE49-F238E27FC236}">
-                <a16:creationId xmlns:a16="http://schemas.microsoft.com/office/drawing/2014/main" id="{47F60D65-DF1E-4EA6-8CEA-F1729A48F852}"/>
+                <a16:creationId xmlns:a16="http://schemas.microsoft.com/office/drawing/2014/main" id="{92AABDAD-9732-4BB0-97A0-53C2D38BEEE6}"/>
               </a:ext>
             </a:extLst>
           </p:cNvPr>
@@ -10152,7 +10352,7 @@
           <p:cNvPr id="4" name="">
             <a:extLst xmlns:a="http://schemas.openxmlformats.org/drawingml/2006/main">
               <a:ext uri="{FF2B5EF4-FFF2-40B4-BE49-F238E27FC236}">
-                <a16:creationId xmlns:a16="http://schemas.microsoft.com/office/drawing/2014/main" id="{8DFA5C1E-73AC-4B75-9AC6-56C9C79D1111}"/>
+                <a16:creationId xmlns:a16="http://schemas.microsoft.com/office/drawing/2014/main" id="{99DF2FE6-9839-4E38-8D6C-96FE1433EFD3}"/>
               </a:ext>
             </a:extLst>
           </p:cNvPr>
@@ -10209,7 +10409,7 @@
           <p:cNvPr id="5" name="">
             <a:extLst xmlns:a="http://schemas.openxmlformats.org/drawingml/2006/main">
               <a:ext uri="{FF2B5EF4-FFF2-40B4-BE49-F238E27FC236}">
-                <a16:creationId xmlns:a16="http://schemas.microsoft.com/office/drawing/2014/main" id="{4AC2BAD9-A6DA-4106-B5BE-E3E0466E6061}"/>
+                <a16:creationId xmlns:a16="http://schemas.microsoft.com/office/drawing/2014/main" id="{BFD8CDDA-5B53-4E7D-ADE7-645251D184B4}"/>
               </a:ext>
             </a:extLst>
           </p:cNvPr>
@@ -10266,7 +10466,7 @@
           <p:cNvPr id="6" name="">
             <a:extLst xmlns:a="http://schemas.openxmlformats.org/drawingml/2006/main">
               <a:ext uri="{FF2B5EF4-FFF2-40B4-BE49-F238E27FC236}">
-                <a16:creationId xmlns:a16="http://schemas.microsoft.com/office/drawing/2014/main" id="{C4D26839-E7C7-43F7-BCB4-DF29A48E7CD6}"/>
+                <a16:creationId xmlns:a16="http://schemas.microsoft.com/office/drawing/2014/main" id="{5872F7DA-208A-43F9-810D-C09D212FF033}"/>
               </a:ext>
             </a:extLst>
           </p:cNvPr>
@@ -10323,7 +10523,7 @@
           <p:cNvPr id="7" name="">
             <a:extLst xmlns:a="http://schemas.openxmlformats.org/drawingml/2006/main">
               <a:ext uri="{FF2B5EF4-FFF2-40B4-BE49-F238E27FC236}">
-                <a16:creationId xmlns:a16="http://schemas.microsoft.com/office/drawing/2014/main" id="{4066D3DA-E5F5-4975-93B2-F865B4515F9A}"/>
+                <a16:creationId xmlns:a16="http://schemas.microsoft.com/office/drawing/2014/main" id="{75E64AA8-6526-4E6C-931F-AFE80E5687CF}"/>
               </a:ext>
             </a:extLst>
           </p:cNvPr>
@@ -10355,7 +10555,7 @@
           <p:cNvPr id="8" name="">
             <a:extLst xmlns:a="http://schemas.openxmlformats.org/drawingml/2006/main">
               <a:ext uri="{FF2B5EF4-FFF2-40B4-BE49-F238E27FC236}">
-                <a16:creationId xmlns:a16="http://schemas.microsoft.com/office/drawing/2014/main" id="{B91956A7-E680-4F16-8C28-E5B7B55C0481}"/>
+                <a16:creationId xmlns:a16="http://schemas.microsoft.com/office/drawing/2014/main" id="{03B46B03-600A-4F1F-881F-2AF3840D5D60}"/>
               </a:ext>
             </a:extLst>
           </p:cNvPr>
@@ -10412,7 +10612,7 @@
           <p:cNvPr id="9" name="">
             <a:extLst xmlns:a="http://schemas.openxmlformats.org/drawingml/2006/main">
               <a:ext uri="{FF2B5EF4-FFF2-40B4-BE49-F238E27FC236}">
-                <a16:creationId xmlns:a16="http://schemas.microsoft.com/office/drawing/2014/main" id="{14A412E6-81E4-49E2-9F34-F60E600EEA4C}"/>
+                <a16:creationId xmlns:a16="http://schemas.microsoft.com/office/drawing/2014/main" id="{06677FAB-E336-489B-9C4E-B1EADA3BD658}"/>
               </a:ext>
             </a:extLst>
           </p:cNvPr>
@@ -10469,7 +10669,7 @@
           <p:cNvPr id="10" name="">
             <a:extLst xmlns:a="http://schemas.openxmlformats.org/drawingml/2006/main">
               <a:ext uri="{FF2B5EF4-FFF2-40B4-BE49-F238E27FC236}">
-                <a16:creationId xmlns:a16="http://schemas.microsoft.com/office/drawing/2014/main" id="{16017DCC-C809-4AE6-A8D8-EAE6718A972D}"/>
+                <a16:creationId xmlns:a16="http://schemas.microsoft.com/office/drawing/2014/main" id="{BB634D8A-9670-4A98-A4B6-D4ADA0B89898}"/>
               </a:ext>
             </a:extLst>
           </p:cNvPr>
@@ -10526,7 +10726,7 @@
           <p:cNvPr id="11" name="">
             <a:extLst xmlns:a="http://schemas.openxmlformats.org/drawingml/2006/main">
               <a:ext uri="{FF2B5EF4-FFF2-40B4-BE49-F238E27FC236}">
-                <a16:creationId xmlns:a16="http://schemas.microsoft.com/office/drawing/2014/main" id="{57E36379-997A-4CB5-81BF-2F01F83673A1}"/>
+                <a16:creationId xmlns:a16="http://schemas.microsoft.com/office/drawing/2014/main" id="{762C6052-C220-4B34-889C-F2DD1D2FA40C}"/>
               </a:ext>
             </a:extLst>
           </p:cNvPr>
@@ -10583,7 +10783,7 @@
           <p:cNvPr id="12" name="">
             <a:extLst xmlns:a="http://schemas.openxmlformats.org/drawingml/2006/main">
               <a:ext uri="{FF2B5EF4-FFF2-40B4-BE49-F238E27FC236}">
-                <a16:creationId xmlns:a16="http://schemas.microsoft.com/office/drawing/2014/main" id="{FF690044-ACCA-4AAD-ADD2-EFE443289894}"/>
+                <a16:creationId xmlns:a16="http://schemas.microsoft.com/office/drawing/2014/main" id="{DD16F638-9CA8-41C5-8383-67B35276FD7C}"/>
               </a:ext>
             </a:extLst>
           </p:cNvPr>
@@ -10640,7 +10840,7 @@
           <p:cNvPr id="13" name="">
             <a:extLst xmlns:a="http://schemas.openxmlformats.org/drawingml/2006/main">
               <a:ext uri="{FF2B5EF4-FFF2-40B4-BE49-F238E27FC236}">
-                <a16:creationId xmlns:a16="http://schemas.microsoft.com/office/drawing/2014/main" id="{57BAB122-656E-42F3-8274-4639D26D71FA}"/>
+                <a16:creationId xmlns:a16="http://schemas.microsoft.com/office/drawing/2014/main" id="{5FFB293B-E6E1-4B0A-A1D1-279B75B446F3}"/>
               </a:ext>
             </a:extLst>
           </p:cNvPr>
@@ -10697,7 +10897,7 @@
           <p:cNvPr id="14" name="">
             <a:extLst xmlns:a="http://schemas.openxmlformats.org/drawingml/2006/main">
               <a:ext uri="{FF2B5EF4-FFF2-40B4-BE49-F238E27FC236}">
-                <a16:creationId xmlns:a16="http://schemas.microsoft.com/office/drawing/2014/main" id="{3CB9BCE6-AC06-47E9-B7E6-F69F21E4D42E}"/>
+                <a16:creationId xmlns:a16="http://schemas.microsoft.com/office/drawing/2014/main" id="{8461C56E-B06F-4C8D-96A2-5CA78D2D9F7D}"/>
               </a:ext>
             </a:extLst>
           </p:cNvPr>
@@ -10754,7 +10954,7 @@
           <p:cNvPr id="15" name="">
             <a:extLst xmlns:a="http://schemas.openxmlformats.org/drawingml/2006/main">
               <a:ext uri="{FF2B5EF4-FFF2-40B4-BE49-F238E27FC236}">
-                <a16:creationId xmlns:a16="http://schemas.microsoft.com/office/drawing/2014/main" id="{8446C5F0-8222-4B4D-9D6E-952359758A95}"/>
+                <a16:creationId xmlns:a16="http://schemas.microsoft.com/office/drawing/2014/main" id="{322CD355-62CC-44F9-B273-AAFA48C15F69}"/>
               </a:ext>
             </a:extLst>
           </p:cNvPr>
@@ -10809,7 +11009,7 @@
     </p:spTree>
     <p:extLst>
       <p:ext uri="{BB962C8B-B14F-4D97-AF65-F5344CB8AC3E}">
-        <p14:creationId xmlns:p14="http://schemas.microsoft.com/office/powerpoint/2010/main" val="1918706157"/>
+        <p14:creationId xmlns:p14="http://schemas.microsoft.com/office/powerpoint/2010/main" val="26116525"/>
       </p:ext>
     </p:extLst>
   </p:cSld>
@@ -10964,7 +11164,7 @@
           <p:cNvPr id="16" name="">
             <a:extLst xmlns:a="http://schemas.openxmlformats.org/drawingml/2006/main">
               <a:ext uri="{FF2B5EF4-FFF2-40B4-BE49-F238E27FC236}">
-                <a16:creationId xmlns:a16="http://schemas.microsoft.com/office/drawing/2014/main" id="{054C6190-DFBC-4ED7-86BC-959BFCBBB8F3}"/>
+                <a16:creationId xmlns:a16="http://schemas.microsoft.com/office/drawing/2014/main" id="{8C21EB38-C0CF-48B8-9E06-F52FE884AC6C}"/>
               </a:ext>
             </a:extLst>
           </p:cNvPr>
@@ -10996,7 +11196,7 @@
           <p:cNvPr id="2" name="">
             <a:extLst xmlns:a="http://schemas.openxmlformats.org/drawingml/2006/main">
               <a:ext uri="{FF2B5EF4-FFF2-40B4-BE49-F238E27FC236}">
-                <a16:creationId xmlns:a16="http://schemas.microsoft.com/office/drawing/2014/main" id="{E464F15D-E15A-474A-8301-5FF053F1C423}"/>
+                <a16:creationId xmlns:a16="http://schemas.microsoft.com/office/drawing/2014/main" id="{E8C58432-31BD-46F3-999D-A37D05FDECA4}"/>
               </a:ext>
             </a:extLst>
           </p:cNvPr>
@@ -11053,7 +11253,7 @@
           <p:cNvPr id="3" name="">
             <a:extLst xmlns:a="http://schemas.openxmlformats.org/drawingml/2006/main">
               <a:ext uri="{FF2B5EF4-FFF2-40B4-BE49-F238E27FC236}">
-                <a16:creationId xmlns:a16="http://schemas.microsoft.com/office/drawing/2014/main" id="{D9292035-E7D8-4BE1-8236-92C68C6BBC46}"/>
+                <a16:creationId xmlns:a16="http://schemas.microsoft.com/office/drawing/2014/main" id="{4F69450A-FEFB-48C7-A95E-E09A353348ED}"/>
               </a:ext>
             </a:extLst>
           </p:cNvPr>
@@ -11085,7 +11285,7 @@
           <p:cNvPr id="4" name="">
             <a:extLst xmlns:a="http://schemas.openxmlformats.org/drawingml/2006/main">
               <a:ext uri="{FF2B5EF4-FFF2-40B4-BE49-F238E27FC236}">
-                <a16:creationId xmlns:a16="http://schemas.microsoft.com/office/drawing/2014/main" id="{4F508625-6D99-45C2-9607-088F4DA51ABE}"/>
+                <a16:creationId xmlns:a16="http://schemas.microsoft.com/office/drawing/2014/main" id="{9C0E7FF9-B671-4E2F-A13D-A08D034B950F}"/>
               </a:ext>
             </a:extLst>
           </p:cNvPr>
@@ -11142,7 +11342,7 @@
           <p:cNvPr id="5" name="">
             <a:extLst xmlns:a="http://schemas.openxmlformats.org/drawingml/2006/main">
               <a:ext uri="{FF2B5EF4-FFF2-40B4-BE49-F238E27FC236}">
-                <a16:creationId xmlns:a16="http://schemas.microsoft.com/office/drawing/2014/main" id="{2BDA00E3-431B-40BE-81BA-1C377E8CD62C}"/>
+                <a16:creationId xmlns:a16="http://schemas.microsoft.com/office/drawing/2014/main" id="{0DA52F76-A075-4C50-9359-95DE73E319D5}"/>
               </a:ext>
             </a:extLst>
           </p:cNvPr>
@@ -11199,7 +11399,7 @@
           <p:cNvPr id="6" name="">
             <a:extLst xmlns:a="http://schemas.openxmlformats.org/drawingml/2006/main">
               <a:ext uri="{FF2B5EF4-FFF2-40B4-BE49-F238E27FC236}">
-                <a16:creationId xmlns:a16="http://schemas.microsoft.com/office/drawing/2014/main" id="{05F309E8-EC6A-4D57-9632-1990D506AF8C}"/>
+                <a16:creationId xmlns:a16="http://schemas.microsoft.com/office/drawing/2014/main" id="{30C0238A-ECA9-4C79-A793-7E79F38A1F72}"/>
               </a:ext>
             </a:extLst>
           </p:cNvPr>
@@ -11256,7 +11456,7 @@
           <p:cNvPr id="7" name="">
             <a:extLst xmlns:a="http://schemas.openxmlformats.org/drawingml/2006/main">
               <a:ext uri="{FF2B5EF4-FFF2-40B4-BE49-F238E27FC236}">
-                <a16:creationId xmlns:a16="http://schemas.microsoft.com/office/drawing/2014/main" id="{8A2F74F9-48AD-465F-A5FC-0A285BC71A1C}"/>
+                <a16:creationId xmlns:a16="http://schemas.microsoft.com/office/drawing/2014/main" id="{5D6C3F8E-E057-40D9-BB81-4ED75536C3A4}"/>
               </a:ext>
             </a:extLst>
           </p:cNvPr>
@@ -11288,7 +11488,7 @@
           <p:cNvPr id="8" name="">
             <a:extLst xmlns:a="http://schemas.openxmlformats.org/drawingml/2006/main">
               <a:ext uri="{FF2B5EF4-FFF2-40B4-BE49-F238E27FC236}">
-                <a16:creationId xmlns:a16="http://schemas.microsoft.com/office/drawing/2014/main" id="{523B347C-2958-4633-BAF9-B81C5ABCB15E}"/>
+                <a16:creationId xmlns:a16="http://schemas.microsoft.com/office/drawing/2014/main" id="{44C7A74F-F15C-48AA-8FF1-BD27B2520CD9}"/>
               </a:ext>
             </a:extLst>
           </p:cNvPr>
@@ -11345,7 +11545,7 @@
           <p:cNvPr id="9" name="">
             <a:extLst xmlns:a="http://schemas.openxmlformats.org/drawingml/2006/main">
               <a:ext uri="{FF2B5EF4-FFF2-40B4-BE49-F238E27FC236}">
-                <a16:creationId xmlns:a16="http://schemas.microsoft.com/office/drawing/2014/main" id="{17C6182C-98F3-4B5B-B6D8-AFAF35553D64}"/>
+                <a16:creationId xmlns:a16="http://schemas.microsoft.com/office/drawing/2014/main" id="{A8CB514E-D8E1-4E9F-BC9E-EA92B4C5BAF9}"/>
               </a:ext>
             </a:extLst>
           </p:cNvPr>
@@ -11406,7 +11606,7 @@
           <p:nvPr/>
         </p:nvPicPr>
         <p:blipFill>
-          <a:blip xmlns:r="http://schemas.openxmlformats.org/officeDocument/2006/relationships" xmlns:a="http://schemas.openxmlformats.org/drawingml/2006/main" r:embed="Rd519dd574ebc4bfb"/>
+          <a:blip xmlns:r="http://schemas.openxmlformats.org/officeDocument/2006/relationships" xmlns:a="http://schemas.openxmlformats.org/drawingml/2006/main" r:embed="R85e25353ec8e4241"/>
           <a:stretch xmlns:a="http://schemas.openxmlformats.org/drawingml/2006/main"/>
         </p:blipFill>
         <p:spPr>
@@ -11424,7 +11624,7 @@
           <p:cNvPr id="11" name="">
             <a:extLst xmlns:a="http://schemas.openxmlformats.org/drawingml/2006/main">
               <a:ext uri="{FF2B5EF4-FFF2-40B4-BE49-F238E27FC236}">
-                <a16:creationId xmlns:a16="http://schemas.microsoft.com/office/drawing/2014/main" id="{93852341-C2CC-4412-8842-9752737729B1}"/>
+                <a16:creationId xmlns:a16="http://schemas.microsoft.com/office/drawing/2014/main" id="{7EAD39E4-96F2-481E-880A-7518995F45AB}"/>
               </a:ext>
             </a:extLst>
           </p:cNvPr>
@@ -11481,7 +11681,7 @@
           <p:cNvPr id="12" name="">
             <a:extLst xmlns:a="http://schemas.openxmlformats.org/drawingml/2006/main">
               <a:ext uri="{FF2B5EF4-FFF2-40B4-BE49-F238E27FC236}">
-                <a16:creationId xmlns:a16="http://schemas.microsoft.com/office/drawing/2014/main" id="{B11809D7-000E-4224-A0E4-D73BF2B316DD}"/>
+                <a16:creationId xmlns:a16="http://schemas.microsoft.com/office/drawing/2014/main" id="{009E0414-B8F2-47CC-8524-91BA2C5AD046}"/>
               </a:ext>
             </a:extLst>
           </p:cNvPr>
@@ -11538,7 +11738,7 @@
           <p:cNvPr id="13" name="">
             <a:extLst xmlns:a="http://schemas.openxmlformats.org/drawingml/2006/main">
               <a:ext uri="{FF2B5EF4-FFF2-40B4-BE49-F238E27FC236}">
-                <a16:creationId xmlns:a16="http://schemas.microsoft.com/office/drawing/2014/main" id="{6BC48651-ACF8-420D-952B-5808660B83A4}"/>
+                <a16:creationId xmlns:a16="http://schemas.microsoft.com/office/drawing/2014/main" id="{832BDC72-A00D-4614-ADE5-9D66865B96B6}"/>
               </a:ext>
             </a:extLst>
           </p:cNvPr>
@@ -11570,7 +11770,7 @@
           <p:cNvPr id="14" name="">
             <a:extLst xmlns:a="http://schemas.openxmlformats.org/drawingml/2006/main">
               <a:ext uri="{FF2B5EF4-FFF2-40B4-BE49-F238E27FC236}">
-                <a16:creationId xmlns:a16="http://schemas.microsoft.com/office/drawing/2014/main" id="{63A90967-5E45-49A4-9312-0D66DA8A2A11}"/>
+                <a16:creationId xmlns:a16="http://schemas.microsoft.com/office/drawing/2014/main" id="{5265CE6C-2F19-419B-AA2D-94266FB9BF15}"/>
               </a:ext>
             </a:extLst>
           </p:cNvPr>
@@ -11627,7 +11827,7 @@
           <p:cNvPr id="15" name="">
             <a:extLst xmlns:a="http://schemas.openxmlformats.org/drawingml/2006/main">
               <a:ext uri="{FF2B5EF4-FFF2-40B4-BE49-F238E27FC236}">
-                <a16:creationId xmlns:a16="http://schemas.microsoft.com/office/drawing/2014/main" id="{A1E05B94-DDAC-40E2-B62B-33084E162220}"/>
+                <a16:creationId xmlns:a16="http://schemas.microsoft.com/office/drawing/2014/main" id="{6D43E432-D279-4397-ACFE-A38BEA619772}"/>
               </a:ext>
             </a:extLst>
           </p:cNvPr>
@@ -11682,7 +11882,7 @@
     </p:spTree>
     <p:extLst>
       <p:ext uri="{BB962C8B-B14F-4D97-AF65-F5344CB8AC3E}">
-        <p14:creationId xmlns:p14="http://schemas.microsoft.com/office/powerpoint/2010/main" val="816467109"/>
+        <p14:creationId xmlns:p14="http://schemas.microsoft.com/office/powerpoint/2010/main" val="1817111142"/>
       </p:ext>
     </p:extLst>
   </p:cSld>
@@ -11837,7 +12037,7 @@
           <p:cNvPr id="23" name="">
             <a:extLst xmlns:a="http://schemas.openxmlformats.org/drawingml/2006/main">
               <a:ext uri="{FF2B5EF4-FFF2-40B4-BE49-F238E27FC236}">
-                <a16:creationId xmlns:a16="http://schemas.microsoft.com/office/drawing/2014/main" id="{29EAB40E-C358-4C4D-BFC7-BDF03DA4D7B3}"/>
+                <a16:creationId xmlns:a16="http://schemas.microsoft.com/office/drawing/2014/main" id="{FC7F63B1-EA7E-46AC-90C7-FE2F27AA14A4}"/>
               </a:ext>
             </a:extLst>
           </p:cNvPr>
@@ -11869,7 +12069,7 @@
           <p:cNvPr id="2" name="">
             <a:extLst xmlns:a="http://schemas.openxmlformats.org/drawingml/2006/main">
               <a:ext uri="{FF2B5EF4-FFF2-40B4-BE49-F238E27FC236}">
-                <a16:creationId xmlns:a16="http://schemas.microsoft.com/office/drawing/2014/main" id="{DF279310-A3BB-45E7-8B3F-056D276C7135}"/>
+                <a16:creationId xmlns:a16="http://schemas.microsoft.com/office/drawing/2014/main" id="{AAFAE574-161B-4FD2-AF40-E9506D750338}"/>
               </a:ext>
             </a:extLst>
           </p:cNvPr>
@@ -11926,7 +12126,7 @@
           <p:cNvPr id="3" name="">
             <a:extLst xmlns:a="http://schemas.openxmlformats.org/drawingml/2006/main">
               <a:ext uri="{FF2B5EF4-FFF2-40B4-BE49-F238E27FC236}">
-                <a16:creationId xmlns:a16="http://schemas.microsoft.com/office/drawing/2014/main" id="{50E95D63-5911-40AA-91BD-BA83EF977BF7}"/>
+                <a16:creationId xmlns:a16="http://schemas.microsoft.com/office/drawing/2014/main" id="{B514F3F1-5746-44A8-8FA0-0C65420A921B}"/>
               </a:ext>
             </a:extLst>
           </p:cNvPr>
@@ -11958,7 +12158,7 @@
           <p:cNvPr id="4" name="">
             <a:extLst xmlns:a="http://schemas.openxmlformats.org/drawingml/2006/main">
               <a:ext uri="{FF2B5EF4-FFF2-40B4-BE49-F238E27FC236}">
-                <a16:creationId xmlns:a16="http://schemas.microsoft.com/office/drawing/2014/main" id="{31640591-04AF-4AE9-84FB-F348F8FDE5A8}"/>
+                <a16:creationId xmlns:a16="http://schemas.microsoft.com/office/drawing/2014/main" id="{4EB6F6A6-9390-4092-A065-BDE5F7F200DA}"/>
               </a:ext>
             </a:extLst>
           </p:cNvPr>
@@ -12015,7 +12215,7 @@
           <p:cNvPr id="5" name="">
             <a:extLst xmlns:a="http://schemas.openxmlformats.org/drawingml/2006/main">
               <a:ext uri="{FF2B5EF4-FFF2-40B4-BE49-F238E27FC236}">
-                <a16:creationId xmlns:a16="http://schemas.microsoft.com/office/drawing/2014/main" id="{1844F8BF-66C4-4CC7-9231-E8B4E9D6715E}"/>
+                <a16:creationId xmlns:a16="http://schemas.microsoft.com/office/drawing/2014/main" id="{0340B108-186B-45CB-820B-9672C93C3880}"/>
               </a:ext>
             </a:extLst>
           </p:cNvPr>
@@ -12072,7 +12272,7 @@
           <p:cNvPr id="6" name="">
             <a:extLst xmlns:a="http://schemas.openxmlformats.org/drawingml/2006/main">
               <a:ext uri="{FF2B5EF4-FFF2-40B4-BE49-F238E27FC236}">
-                <a16:creationId xmlns:a16="http://schemas.microsoft.com/office/drawing/2014/main" id="{E3FA9CF0-9B06-4C10-9019-8463463C4849}"/>
+                <a16:creationId xmlns:a16="http://schemas.microsoft.com/office/drawing/2014/main" id="{EC776024-FEA8-4A30-B35A-5367E428BBA3}"/>
               </a:ext>
             </a:extLst>
           </p:cNvPr>
@@ -12129,7 +12329,7 @@
           <p:cNvPr id="7" name="">
             <a:extLst xmlns:a="http://schemas.openxmlformats.org/drawingml/2006/main">
               <a:ext uri="{FF2B5EF4-FFF2-40B4-BE49-F238E27FC236}">
-                <a16:creationId xmlns:a16="http://schemas.microsoft.com/office/drawing/2014/main" id="{948C6A32-C474-406A-8002-0EA69D2E7476}"/>
+                <a16:creationId xmlns:a16="http://schemas.microsoft.com/office/drawing/2014/main" id="{D950AB10-9AA6-4C20-A385-CFABDD3B382C}"/>
               </a:ext>
             </a:extLst>
           </p:cNvPr>
@@ -12161,7 +12361,7 @@
           <p:cNvPr id="8" name="">
             <a:extLst xmlns:a="http://schemas.openxmlformats.org/drawingml/2006/main">
               <a:ext uri="{FF2B5EF4-FFF2-40B4-BE49-F238E27FC236}">
-                <a16:creationId xmlns:a16="http://schemas.microsoft.com/office/drawing/2014/main" id="{6F1A39F9-7950-4D13-A249-5F2FCF79BFF1}"/>
+                <a16:creationId xmlns:a16="http://schemas.microsoft.com/office/drawing/2014/main" id="{368FADA7-FDB2-40F8-98A9-F97735C7C606}"/>
               </a:ext>
             </a:extLst>
           </p:cNvPr>
@@ -12218,7 +12418,7 @@
           <p:cNvPr id="9" name="">
             <a:extLst xmlns:a="http://schemas.openxmlformats.org/drawingml/2006/main">
               <a:ext uri="{FF2B5EF4-FFF2-40B4-BE49-F238E27FC236}">
-                <a16:creationId xmlns:a16="http://schemas.microsoft.com/office/drawing/2014/main" id="{BFD44506-C941-421E-B0C2-A8C78BF113B8}"/>
+                <a16:creationId xmlns:a16="http://schemas.microsoft.com/office/drawing/2014/main" id="{40E265E0-8E20-493B-82FA-C089F399FB83}"/>
               </a:ext>
             </a:extLst>
           </p:cNvPr>
@@ -12275,7 +12475,7 @@
           <p:cNvPr id="10" name="">
             <a:extLst xmlns:a="http://schemas.openxmlformats.org/drawingml/2006/main">
               <a:ext uri="{FF2B5EF4-FFF2-40B4-BE49-F238E27FC236}">
-                <a16:creationId xmlns:a16="http://schemas.microsoft.com/office/drawing/2014/main" id="{51B05147-BA89-4BD4-9F18-0C23D2F3ED1B}"/>
+                <a16:creationId xmlns:a16="http://schemas.microsoft.com/office/drawing/2014/main" id="{E244F470-7DBA-4519-9AEC-1A485B41C4F7}"/>
               </a:ext>
             </a:extLst>
           </p:cNvPr>
@@ -12309,7 +12509,7 @@
           <p:cNvPr id="11" name="">
             <a:extLst xmlns:a="http://schemas.openxmlformats.org/drawingml/2006/main">
               <a:ext uri="{FF2B5EF4-FFF2-40B4-BE49-F238E27FC236}">
-                <a16:creationId xmlns:a16="http://schemas.microsoft.com/office/drawing/2014/main" id="{1569548D-6426-4A74-9A67-7A1B8FD11AFD}"/>
+                <a16:creationId xmlns:a16="http://schemas.microsoft.com/office/drawing/2014/main" id="{9E1BC80E-6A8D-4FE6-AD42-88A2A76DCF7C}"/>
               </a:ext>
             </a:extLst>
           </p:cNvPr>
@@ -12341,7 +12541,7 @@
           <p:cNvPr id="12" name="">
             <a:extLst xmlns:a="http://schemas.openxmlformats.org/drawingml/2006/main">
               <a:ext uri="{FF2B5EF4-FFF2-40B4-BE49-F238E27FC236}">
-                <a16:creationId xmlns:a16="http://schemas.microsoft.com/office/drawing/2014/main" id="{23AC02F3-ACB2-4C5A-967A-4CA5154586B6}"/>
+                <a16:creationId xmlns:a16="http://schemas.microsoft.com/office/drawing/2014/main" id="{8BDEE5B0-C3F1-4C37-90C3-076D22DEF275}"/>
               </a:ext>
             </a:extLst>
           </p:cNvPr>
@@ -12398,7 +12598,7 @@
           <p:cNvPr id="13" name="">
             <a:extLst xmlns:a="http://schemas.openxmlformats.org/drawingml/2006/main">
               <a:ext uri="{FF2B5EF4-FFF2-40B4-BE49-F238E27FC236}">
-                <a16:creationId xmlns:a16="http://schemas.microsoft.com/office/drawing/2014/main" id="{21D5832B-A387-48A7-8000-CB5F8EA3F729}"/>
+                <a16:creationId xmlns:a16="http://schemas.microsoft.com/office/drawing/2014/main" id="{01D3DEA1-5A18-4C77-9845-2492DA77C4E9}"/>
               </a:ext>
             </a:extLst>
           </p:cNvPr>
@@ -12455,7 +12655,7 @@
           <p:cNvPr id="14" name="">
             <a:extLst xmlns:a="http://schemas.openxmlformats.org/drawingml/2006/main">
               <a:ext uri="{FF2B5EF4-FFF2-40B4-BE49-F238E27FC236}">
-                <a16:creationId xmlns:a16="http://schemas.microsoft.com/office/drawing/2014/main" id="{DBCF21F8-D796-4FA1-B8D0-84F2D104AF81}"/>
+                <a16:creationId xmlns:a16="http://schemas.microsoft.com/office/drawing/2014/main" id="{E1235584-7795-4249-A466-55C83638C272}"/>
               </a:ext>
             </a:extLst>
           </p:cNvPr>
@@ -12489,7 +12689,7 @@
           <p:cNvPr id="15" name="">
             <a:extLst xmlns:a="http://schemas.openxmlformats.org/drawingml/2006/main">
               <a:ext uri="{FF2B5EF4-FFF2-40B4-BE49-F238E27FC236}">
-                <a16:creationId xmlns:a16="http://schemas.microsoft.com/office/drawing/2014/main" id="{D135812D-9AC5-46B3-A43E-11E095F09388}"/>
+                <a16:creationId xmlns:a16="http://schemas.microsoft.com/office/drawing/2014/main" id="{FB9A5D44-7844-4F4C-9986-2994AC2A76E5}"/>
               </a:ext>
             </a:extLst>
           </p:cNvPr>
@@ -12521,7 +12721,7 @@
           <p:cNvPr id="16" name="">
             <a:extLst xmlns:a="http://schemas.openxmlformats.org/drawingml/2006/main">
               <a:ext uri="{FF2B5EF4-FFF2-40B4-BE49-F238E27FC236}">
-                <a16:creationId xmlns:a16="http://schemas.microsoft.com/office/drawing/2014/main" id="{5ED40394-D6A7-4E33-9431-5E5356821652}"/>
+                <a16:creationId xmlns:a16="http://schemas.microsoft.com/office/drawing/2014/main" id="{87476353-45CA-4198-8B93-894F8DB37F80}"/>
               </a:ext>
             </a:extLst>
           </p:cNvPr>
@@ -12578,7 +12778,7 @@
           <p:cNvPr id="17" name="">
             <a:extLst xmlns:a="http://schemas.openxmlformats.org/drawingml/2006/main">
               <a:ext uri="{FF2B5EF4-FFF2-40B4-BE49-F238E27FC236}">
-                <a16:creationId xmlns:a16="http://schemas.microsoft.com/office/drawing/2014/main" id="{F62ABE4D-8577-4A3F-B08B-9615940FB08D}"/>
+                <a16:creationId xmlns:a16="http://schemas.microsoft.com/office/drawing/2014/main" id="{4B99B3A4-045D-4ED6-B6C3-00CFA350F3A0}"/>
               </a:ext>
             </a:extLst>
           </p:cNvPr>
@@ -12635,7 +12835,7 @@
           <p:cNvPr id="18" name="">
             <a:extLst xmlns:a="http://schemas.openxmlformats.org/drawingml/2006/main">
               <a:ext uri="{FF2B5EF4-FFF2-40B4-BE49-F238E27FC236}">
-                <a16:creationId xmlns:a16="http://schemas.microsoft.com/office/drawing/2014/main" id="{2F58639A-839E-4ADB-9000-455B18EA23FD}"/>
+                <a16:creationId xmlns:a16="http://schemas.microsoft.com/office/drawing/2014/main" id="{447FFEF0-974B-4906-B020-621F1AAEBA58}"/>
               </a:ext>
             </a:extLst>
           </p:cNvPr>
@@ -12669,7 +12869,7 @@
           <p:cNvPr id="19" name="">
             <a:extLst xmlns:a="http://schemas.openxmlformats.org/drawingml/2006/main">
               <a:ext uri="{FF2B5EF4-FFF2-40B4-BE49-F238E27FC236}">
-                <a16:creationId xmlns:a16="http://schemas.microsoft.com/office/drawing/2014/main" id="{9D0FBFE0-D63B-4E3A-8EA5-2AD82E05611C}"/>
+                <a16:creationId xmlns:a16="http://schemas.microsoft.com/office/drawing/2014/main" id="{D3913EF3-A3E1-464B-BBDC-C2B5F9DD88B0}"/>
               </a:ext>
             </a:extLst>
           </p:cNvPr>
@@ -12701,7 +12901,7 @@
           <p:cNvPr id="20" name="">
             <a:extLst xmlns:a="http://schemas.openxmlformats.org/drawingml/2006/main">
               <a:ext uri="{FF2B5EF4-FFF2-40B4-BE49-F238E27FC236}">
-                <a16:creationId xmlns:a16="http://schemas.microsoft.com/office/drawing/2014/main" id="{68740CB6-EC23-4EC4-82BF-535AD3A5A077}"/>
+                <a16:creationId xmlns:a16="http://schemas.microsoft.com/office/drawing/2014/main" id="{3A16C9C3-DC6A-417E-9203-2A61517D3EA9}"/>
               </a:ext>
             </a:extLst>
           </p:cNvPr>
@@ -12758,7 +12958,7 @@
           <p:cNvPr id="21" name="">
             <a:extLst xmlns:a="http://schemas.openxmlformats.org/drawingml/2006/main">
               <a:ext uri="{FF2B5EF4-FFF2-40B4-BE49-F238E27FC236}">
-                <a16:creationId xmlns:a16="http://schemas.microsoft.com/office/drawing/2014/main" id="{35C04289-ED80-42F7-8739-D15B9C64D71F}"/>
+                <a16:creationId xmlns:a16="http://schemas.microsoft.com/office/drawing/2014/main" id="{D6910B1B-A33E-4C97-BC8A-AE9A7022B53C}"/>
               </a:ext>
             </a:extLst>
           </p:cNvPr>
@@ -12815,7 +13015,7 @@
           <p:cNvPr id="22" name="">
             <a:extLst xmlns:a="http://schemas.openxmlformats.org/drawingml/2006/main">
               <a:ext uri="{FF2B5EF4-FFF2-40B4-BE49-F238E27FC236}">
-                <a16:creationId xmlns:a16="http://schemas.microsoft.com/office/drawing/2014/main" id="{C17FB5AC-F60E-47D1-86BA-513400E76307}"/>
+                <a16:creationId xmlns:a16="http://schemas.microsoft.com/office/drawing/2014/main" id="{E4DCABE5-FE8B-48D7-B415-8BFC3E3ED2F9}"/>
               </a:ext>
             </a:extLst>
           </p:cNvPr>
@@ -12870,7 +13070,7 @@
     </p:spTree>
     <p:extLst>
       <p:ext uri="{BB962C8B-B14F-4D97-AF65-F5344CB8AC3E}">
-        <p14:creationId xmlns:p14="http://schemas.microsoft.com/office/powerpoint/2010/main" val="565990086"/>
+        <p14:creationId xmlns:p14="http://schemas.microsoft.com/office/powerpoint/2010/main" val="1378719359"/>
       </p:ext>
     </p:extLst>
   </p:cSld>
@@ -13071,7 +13271,7 @@
           <p:cNvPr id="22" name="">
             <a:extLst xmlns:a="http://schemas.openxmlformats.org/drawingml/2006/main">
               <a:ext uri="{FF2B5EF4-FFF2-40B4-BE49-F238E27FC236}">
-                <a16:creationId xmlns:a16="http://schemas.microsoft.com/office/drawing/2014/main" id="{4E791CC2-CFCC-4A83-8644-42E15B06A11B}"/>
+                <a16:creationId xmlns:a16="http://schemas.microsoft.com/office/drawing/2014/main" id="{13C73220-703F-41E2-8806-D9F530C14742}"/>
               </a:ext>
             </a:extLst>
           </p:cNvPr>
@@ -13103,7 +13303,7 @@
           <p:cNvPr id="2" name="">
             <a:extLst xmlns:a="http://schemas.openxmlformats.org/drawingml/2006/main">
               <a:ext uri="{FF2B5EF4-FFF2-40B4-BE49-F238E27FC236}">
-                <a16:creationId xmlns:a16="http://schemas.microsoft.com/office/drawing/2014/main" id="{3FAD06DD-97B3-4C47-89A9-86DD86CAB12E}"/>
+                <a16:creationId xmlns:a16="http://schemas.microsoft.com/office/drawing/2014/main" id="{9FC04165-66C8-4D96-9412-BFB79A292116}"/>
               </a:ext>
             </a:extLst>
           </p:cNvPr>
@@ -13160,7 +13360,7 @@
           <p:cNvPr id="3" name="">
             <a:extLst xmlns:a="http://schemas.openxmlformats.org/drawingml/2006/main">
               <a:ext uri="{FF2B5EF4-FFF2-40B4-BE49-F238E27FC236}">
-                <a16:creationId xmlns:a16="http://schemas.microsoft.com/office/drawing/2014/main" id="{E98C44BE-9E77-4149-A69E-3BDD4C11D8E0}"/>
+                <a16:creationId xmlns:a16="http://schemas.microsoft.com/office/drawing/2014/main" id="{A9321696-45BC-4CF4-A68E-1D0DACA6D97F}"/>
               </a:ext>
             </a:extLst>
           </p:cNvPr>
@@ -13192,7 +13392,7 @@
           <p:cNvPr id="4" name="">
             <a:extLst xmlns:a="http://schemas.openxmlformats.org/drawingml/2006/main">
               <a:ext uri="{FF2B5EF4-FFF2-40B4-BE49-F238E27FC236}">
-                <a16:creationId xmlns:a16="http://schemas.microsoft.com/office/drawing/2014/main" id="{44A39C96-8B75-43FF-B72A-8BBAE60CB2E2}"/>
+                <a16:creationId xmlns:a16="http://schemas.microsoft.com/office/drawing/2014/main" id="{FAFD7D7E-0BD0-4C3F-A70C-DEF97737FBAE}"/>
               </a:ext>
             </a:extLst>
           </p:cNvPr>
@@ -13249,7 +13449,7 @@
           <p:cNvPr id="5" name="">
             <a:extLst xmlns:a="http://schemas.openxmlformats.org/drawingml/2006/main">
               <a:ext uri="{FF2B5EF4-FFF2-40B4-BE49-F238E27FC236}">
-                <a16:creationId xmlns:a16="http://schemas.microsoft.com/office/drawing/2014/main" id="{0A5F086B-F5BD-488C-B2F7-B53767F531F4}"/>
+                <a16:creationId xmlns:a16="http://schemas.microsoft.com/office/drawing/2014/main" id="{CDE6F0FF-0BD1-4E79-9113-74E8CF64C50D}"/>
               </a:ext>
             </a:extLst>
           </p:cNvPr>
@@ -13306,7 +13506,7 @@
           <p:cNvPr id="6" name="">
             <a:extLst xmlns:a="http://schemas.openxmlformats.org/drawingml/2006/main">
               <a:ext uri="{FF2B5EF4-FFF2-40B4-BE49-F238E27FC236}">
-                <a16:creationId xmlns:a16="http://schemas.microsoft.com/office/drawing/2014/main" id="{019AD723-7622-4BFE-B797-5F576E36011D}"/>
+                <a16:creationId xmlns:a16="http://schemas.microsoft.com/office/drawing/2014/main" id="{D53915EE-BE46-46AD-9ACF-DA02F5EEADB4}"/>
               </a:ext>
             </a:extLst>
           </p:cNvPr>
@@ -13363,7 +13563,7 @@
           <p:cNvPr id="7" name="">
             <a:extLst xmlns:a="http://schemas.openxmlformats.org/drawingml/2006/main">
               <a:ext uri="{FF2B5EF4-FFF2-40B4-BE49-F238E27FC236}">
-                <a16:creationId xmlns:a16="http://schemas.microsoft.com/office/drawing/2014/main" id="{8D6AE066-2CA8-4D93-B0E4-51E9C737FC6A}"/>
+                <a16:creationId xmlns:a16="http://schemas.microsoft.com/office/drawing/2014/main" id="{18257E4E-367A-4FCB-9C2A-5861B1550907}"/>
               </a:ext>
             </a:extLst>
           </p:cNvPr>
@@ -13395,7 +13595,7 @@
           <p:cNvPr id="8" name="">
             <a:extLst xmlns:a="http://schemas.openxmlformats.org/drawingml/2006/main">
               <a:ext uri="{FF2B5EF4-FFF2-40B4-BE49-F238E27FC236}">
-                <a16:creationId xmlns:a16="http://schemas.microsoft.com/office/drawing/2014/main" id="{A580FFDE-ED8A-4D1F-A673-C2141AF55E39}"/>
+                <a16:creationId xmlns:a16="http://schemas.microsoft.com/office/drawing/2014/main" id="{58A204EF-8A43-4145-92F3-6667DDF91369}"/>
               </a:ext>
             </a:extLst>
           </p:cNvPr>
@@ -13452,7 +13652,7 @@
           <p:cNvPr id="9" name="">
             <a:extLst xmlns:a="http://schemas.openxmlformats.org/drawingml/2006/main">
               <a:ext uri="{FF2B5EF4-FFF2-40B4-BE49-F238E27FC236}">
-                <a16:creationId xmlns:a16="http://schemas.microsoft.com/office/drawing/2014/main" id="{1FF5EEF0-815A-456E-875E-D417C4172A80}"/>
+                <a16:creationId xmlns:a16="http://schemas.microsoft.com/office/drawing/2014/main" id="{F4621790-7AB4-4BF0-8307-2C624DE59FDE}"/>
               </a:ext>
             </a:extLst>
           </p:cNvPr>
@@ -13509,7 +13709,7 @@
           <p:cNvPr id="10" name="">
             <a:extLst xmlns:a="http://schemas.openxmlformats.org/drawingml/2006/main">
               <a:ext uri="{FF2B5EF4-FFF2-40B4-BE49-F238E27FC236}">
-                <a16:creationId xmlns:a16="http://schemas.microsoft.com/office/drawing/2014/main" id="{1CD1E6C3-2B4D-467B-86F8-81CE868D9EC8}"/>
+                <a16:creationId xmlns:a16="http://schemas.microsoft.com/office/drawing/2014/main" id="{80CB6334-C74A-4120-BA71-7DC75DAF48E0}"/>
               </a:ext>
             </a:extLst>
           </p:cNvPr>
@@ -13543,7 +13743,7 @@
           <p:cNvPr id="11" name="">
             <a:extLst xmlns:a="http://schemas.openxmlformats.org/drawingml/2006/main">
               <a:ext uri="{FF2B5EF4-FFF2-40B4-BE49-F238E27FC236}">
-                <a16:creationId xmlns:a16="http://schemas.microsoft.com/office/drawing/2014/main" id="{1D7729DC-0AD3-4489-AA8E-DF5876233CC5}"/>
+                <a16:creationId xmlns:a16="http://schemas.microsoft.com/office/drawing/2014/main" id="{A4E9D31C-71EC-461E-93DF-7390624187FA}"/>
               </a:ext>
             </a:extLst>
           </p:cNvPr>
@@ -13575,7 +13775,7 @@
           <p:cNvPr id="12" name="">
             <a:extLst xmlns:a="http://schemas.openxmlformats.org/drawingml/2006/main">
               <a:ext uri="{FF2B5EF4-FFF2-40B4-BE49-F238E27FC236}">
-                <a16:creationId xmlns:a16="http://schemas.microsoft.com/office/drawing/2014/main" id="{6D1E7A5A-07EA-436D-BB96-37F12EE88553}"/>
+                <a16:creationId xmlns:a16="http://schemas.microsoft.com/office/drawing/2014/main" id="{CB3360B5-5D54-4839-A378-322945298532}"/>
               </a:ext>
             </a:extLst>
           </p:cNvPr>
@@ -13632,7 +13832,7 @@
           <p:cNvPr id="13" name="">
             <a:extLst xmlns:a="http://schemas.openxmlformats.org/drawingml/2006/main">
               <a:ext uri="{FF2B5EF4-FFF2-40B4-BE49-F238E27FC236}">
-                <a16:creationId xmlns:a16="http://schemas.microsoft.com/office/drawing/2014/main" id="{33F168E0-1557-497D-9AE3-DDB98D04668D}"/>
+                <a16:creationId xmlns:a16="http://schemas.microsoft.com/office/drawing/2014/main" id="{BD6F7A43-5A4B-440D-B707-706F580F4296}"/>
               </a:ext>
             </a:extLst>
           </p:cNvPr>
@@ -13689,7 +13889,7 @@
           <p:cNvPr id="14" name="">
             <a:extLst xmlns:a="http://schemas.openxmlformats.org/drawingml/2006/main">
               <a:ext uri="{FF2B5EF4-FFF2-40B4-BE49-F238E27FC236}">
-                <a16:creationId xmlns:a16="http://schemas.microsoft.com/office/drawing/2014/main" id="{EAC24F5F-20A1-457C-B8CD-7722011F67D9}"/>
+                <a16:creationId xmlns:a16="http://schemas.microsoft.com/office/drawing/2014/main" id="{3F3384BF-56EF-4444-AED4-110D3863C24D}"/>
               </a:ext>
             </a:extLst>
           </p:cNvPr>
@@ -13723,7 +13923,7 @@
           <p:cNvPr id="15" name="">
             <a:extLst xmlns:a="http://schemas.openxmlformats.org/drawingml/2006/main">
               <a:ext uri="{FF2B5EF4-FFF2-40B4-BE49-F238E27FC236}">
-                <a16:creationId xmlns:a16="http://schemas.microsoft.com/office/drawing/2014/main" id="{1558E7A7-DDA4-4071-97CD-89EF21D4B376}"/>
+                <a16:creationId xmlns:a16="http://schemas.microsoft.com/office/drawing/2014/main" id="{C1C093F8-9C4F-4378-B493-136964B1389B}"/>
               </a:ext>
             </a:extLst>
           </p:cNvPr>
@@ -13755,7 +13955,7 @@
           <p:cNvPr id="16" name="">
             <a:extLst xmlns:a="http://schemas.openxmlformats.org/drawingml/2006/main">
               <a:ext uri="{FF2B5EF4-FFF2-40B4-BE49-F238E27FC236}">
-                <a16:creationId xmlns:a16="http://schemas.microsoft.com/office/drawing/2014/main" id="{8CD27EFD-5E9B-4ED0-B13B-00D7B971A951}"/>
+                <a16:creationId xmlns:a16="http://schemas.microsoft.com/office/drawing/2014/main" id="{A08FF229-2BD0-4ADC-985C-25AE101ED0A6}"/>
               </a:ext>
             </a:extLst>
           </p:cNvPr>
@@ -13812,7 +14012,7 @@
           <p:cNvPr id="17" name="">
             <a:extLst xmlns:a="http://schemas.openxmlformats.org/drawingml/2006/main">
               <a:ext uri="{FF2B5EF4-FFF2-40B4-BE49-F238E27FC236}">
-                <a16:creationId xmlns:a16="http://schemas.microsoft.com/office/drawing/2014/main" id="{6DBF83C2-F31C-48D6-AB54-D645E7265A37}"/>
+                <a16:creationId xmlns:a16="http://schemas.microsoft.com/office/drawing/2014/main" id="{7D3C05B7-3A83-490F-9899-C7872A05E295}"/>
               </a:ext>
             </a:extLst>
           </p:cNvPr>
@@ -13869,7 +14069,7 @@
           <p:cNvPr id="18" name="">
             <a:extLst xmlns:a="http://schemas.openxmlformats.org/drawingml/2006/main">
               <a:ext uri="{FF2B5EF4-FFF2-40B4-BE49-F238E27FC236}">
-                <a16:creationId xmlns:a16="http://schemas.microsoft.com/office/drawing/2014/main" id="{B52C443A-2A0D-4CA6-8A32-9B183297984B}"/>
+                <a16:creationId xmlns:a16="http://schemas.microsoft.com/office/drawing/2014/main" id="{7E9233AF-DB98-4D8B-B571-E26F9012CEAB}"/>
               </a:ext>
             </a:extLst>
           </p:cNvPr>
@@ -13903,7 +14103,7 @@
           <p:cNvPr id="19" name="">
             <a:extLst xmlns:a="http://schemas.openxmlformats.org/drawingml/2006/main">
               <a:ext uri="{FF2B5EF4-FFF2-40B4-BE49-F238E27FC236}">
-                <a16:creationId xmlns:a16="http://schemas.microsoft.com/office/drawing/2014/main" id="{31C4B0C9-B451-4CA5-AD90-D39CC4F2836A}"/>
+                <a16:creationId xmlns:a16="http://schemas.microsoft.com/office/drawing/2014/main" id="{A6987CF1-00B7-477A-9114-D2745D61BB32}"/>
               </a:ext>
             </a:extLst>
           </p:cNvPr>
@@ -13935,7 +14135,7 @@
           <p:cNvPr id="20" name="">
             <a:extLst xmlns:a="http://schemas.openxmlformats.org/drawingml/2006/main">
               <a:ext uri="{FF2B5EF4-FFF2-40B4-BE49-F238E27FC236}">
-                <a16:creationId xmlns:a16="http://schemas.microsoft.com/office/drawing/2014/main" id="{F2ADDF29-2A13-4F7F-8E05-AE395D1B1A88}"/>
+                <a16:creationId xmlns:a16="http://schemas.microsoft.com/office/drawing/2014/main" id="{791D0D84-4D54-40C0-BA14-14EDF046D885}"/>
               </a:ext>
             </a:extLst>
           </p:cNvPr>
@@ -13992,7 +14192,7 @@
           <p:cNvPr id="21" name="">
             <a:extLst xmlns:a="http://schemas.openxmlformats.org/drawingml/2006/main">
               <a:ext uri="{FF2B5EF4-FFF2-40B4-BE49-F238E27FC236}">
-                <a16:creationId xmlns:a16="http://schemas.microsoft.com/office/drawing/2014/main" id="{4343073D-3104-4C48-9BAF-75153BFB29AB}"/>
+                <a16:creationId xmlns:a16="http://schemas.microsoft.com/office/drawing/2014/main" id="{6D2B9C9B-C751-4CF7-93E2-315372AFFFD4}"/>
               </a:ext>
             </a:extLst>
           </p:cNvPr>
@@ -14047,7 +14247,7 @@
     </p:spTree>
     <p:extLst>
       <p:ext uri="{BB962C8B-B14F-4D97-AF65-F5344CB8AC3E}">
-        <p14:creationId xmlns:p14="http://schemas.microsoft.com/office/powerpoint/2010/main" val="1703373288"/>
+        <p14:creationId xmlns:p14="http://schemas.microsoft.com/office/powerpoint/2010/main" val="1422570964"/>
       </p:ext>
     </p:extLst>
   </p:cSld>
